--- a/Mishmer-section/2026-27/binyat-mishmar-mifgash-peticha.pptx
+++ b/Mishmer-section/2026-27/binyat-mishmar-mifgash-peticha.pptx
@@ -3910,7 +3910,7 @@
                 <a:ea typeface="Arial" pitchFamily="34" charset="-122"/>
                 <a:cs typeface="Arial" pitchFamily="34" charset="-120"/>
               </a:rPr>
-              <a:t>המאגר המשותף — למה זה חשוב
+              <a:t>המאגר המשותף — קובץ אחד לכל הצוותים
 </a:t>
             </a:r>
             <a:endParaRPr lang="en-US" sz="1600" dirty="0"/>
@@ -3928,7 +3928,7 @@
                 <a:ea typeface="Arial" pitchFamily="34" charset="-122"/>
                 <a:cs typeface="Arial" pitchFamily="34" charset="-120"/>
               </a:rPr>
-              <a:t>עם 21 משמרים ו-10 חניכים שמחפשים מרצים במקביל, זה הדבר שהכי קל שיישבר: שני זוגות פונים לאותו אדם בלי לדעת. כל פנייה — גם סירוב — נרשמת במאגר המשותף לכל השנה.</a:t>
+              <a:t>המטרה היא לעזור לכולם להישאר מסודרים: לשתף מידע אחד עם השני, ולמנוע כפילויות וטעויות. כל פנייה למרצה — גם סירוב — נרשמת שם, כדי שכל צוות ידע מה כבר קרה לפני שהוא פונה בעצמו.</a:t>
             </a:r>
             <a:endParaRPr lang="en-US" sz="1600" dirty="0"/>
           </a:p>
@@ -7513,7 +7513,7 @@
                 <a:ea typeface="Arial" pitchFamily="34" charset="-122"/>
                 <a:cs typeface="Arial" pitchFamily="34" charset="-120"/>
               </a:rPr>
-              <a:t>הבסיס</a:t>
+              <a:t>המהות</a:t>
             </a:r>
             <a:endParaRPr lang="en-US" sz="1300" dirty="0"/>
           </a:p>
@@ -7566,252 +7566,16 @@
         </p:nvSpPr>
         <p:spPr>
           <a:xfrm>
-            <a:off x="11405311" y="2093976"/>
-            <a:ext cx="91440" cy="91440"/>
-          </a:xfrm>
-          <a:prstGeom prst="ellipse">
-            <a:avLst/>
-          </a:prstGeom>
-          <a:solidFill>
-            <a:srgbClr val="C9A961"/>
-          </a:solidFill>
-          <a:ln/>
-        </p:spPr>
-      </p:sp>
-      <p:sp>
-        <p:nvSpPr>
-          <p:cNvPr id="5" name="Text 3"/>
-          <p:cNvSpPr/>
-          <p:nvPr/>
-        </p:nvSpPr>
-        <p:spPr>
-          <a:xfrm>
-            <a:off x="4846320" y="1965960"/>
-            <a:ext cx="6385255" cy="685800"/>
-          </a:xfrm>
-          <a:prstGeom prst="rect">
-            <a:avLst/>
-          </a:prstGeom>
-          <a:noFill/>
-          <a:ln/>
-        </p:spPr>
-        <p:txBody>
-          <a:bodyPr wrap="square" lIns="0" tIns="0" rIns="0" bIns="0" rtlCol="0" anchor="t"/>
-          <a:lstStyle/>
-          <a:p>
-            <a:pPr algn="r" indent="0" marL="0">
-              <a:buNone/>
-            </a:pPr>
-            <a:r>
-              <a:rPr lang="en-US" sz="1700" dirty="0">
-                <a:solidFill>
-                  <a:srgbClr val="3E3426"/>
-                </a:solidFill>
-                <a:latin typeface="Arial" pitchFamily="34" charset="0"/>
-                <a:ea typeface="Arial" pitchFamily="34" charset="-122"/>
-                <a:cs typeface="Arial" pitchFamily="34" charset="-120"/>
-              </a:rPr>
-              <a:t>ליל חמישי — פעם בשבוע עד שבועיים, לאורך כל השנה</a:t>
-            </a:r>
-            <a:endParaRPr lang="en-US" sz="1700" dirty="0"/>
-          </a:p>
-        </p:txBody>
-      </p:sp>
-      <p:sp>
-        <p:nvSpPr>
-          <p:cNvPr id="6" name="Shape 4"/>
-          <p:cNvSpPr/>
-          <p:nvPr/>
-        </p:nvSpPr>
-        <p:spPr>
-          <a:xfrm>
-            <a:off x="11405311" y="2871216"/>
-            <a:ext cx="91440" cy="91440"/>
-          </a:xfrm>
-          <a:prstGeom prst="ellipse">
-            <a:avLst/>
-          </a:prstGeom>
-          <a:solidFill>
-            <a:srgbClr val="C9A961"/>
-          </a:solidFill>
-          <a:ln/>
-        </p:spPr>
-      </p:sp>
-      <p:sp>
-        <p:nvSpPr>
-          <p:cNvPr id="7" name="Text 5"/>
-          <p:cNvSpPr/>
-          <p:nvPr/>
-        </p:nvSpPr>
-        <p:spPr>
-          <a:xfrm>
-            <a:off x="4846320" y="2743200"/>
-            <a:ext cx="6385255" cy="685800"/>
-          </a:xfrm>
-          <a:prstGeom prst="rect">
-            <a:avLst/>
-          </a:prstGeom>
-          <a:noFill/>
-          <a:ln/>
-        </p:spPr>
-        <p:txBody>
-          <a:bodyPr wrap="square" lIns="0" tIns="0" rIns="0" bIns="0" rtlCol="0" anchor="t"/>
-          <a:lstStyle/>
-          <a:p>
-            <a:pPr algn="r" indent="0" marL="0">
-              <a:buNone/>
-            </a:pPr>
-            <a:r>
-              <a:rPr lang="en-US" sz="1700" dirty="0">
-                <a:solidFill>
-                  <a:srgbClr val="3E3426"/>
-                </a:solidFill>
-                <a:latin typeface="Arial" pitchFamily="34" charset="0"/>
-                <a:ea typeface="Arial" pitchFamily="34" charset="-122"/>
-                <a:cs typeface="Arial" pitchFamily="34" charset="-120"/>
-              </a:rPr>
-              <a:t>קבוצה מעורבת: דתיים וחילונים, אחרי צבא / שנת מכינה</a:t>
-            </a:r>
-            <a:endParaRPr lang="en-US" sz="1700" dirty="0"/>
-          </a:p>
-        </p:txBody>
-      </p:sp>
-      <p:sp>
-        <p:nvSpPr>
-          <p:cNvPr id="8" name="Shape 6"/>
-          <p:cNvSpPr/>
-          <p:nvPr/>
-        </p:nvSpPr>
-        <p:spPr>
-          <a:xfrm>
-            <a:off x="11405311" y="3648456"/>
-            <a:ext cx="91440" cy="91440"/>
-          </a:xfrm>
-          <a:prstGeom prst="ellipse">
-            <a:avLst/>
-          </a:prstGeom>
-          <a:solidFill>
-            <a:srgbClr val="C9A961"/>
-          </a:solidFill>
-          <a:ln/>
-        </p:spPr>
-      </p:sp>
-      <p:sp>
-        <p:nvSpPr>
-          <p:cNvPr id="9" name="Text 7"/>
-          <p:cNvSpPr/>
-          <p:nvPr/>
-        </p:nvSpPr>
-        <p:spPr>
-          <a:xfrm>
-            <a:off x="4846320" y="3520440"/>
-            <a:ext cx="6385255" cy="685800"/>
-          </a:xfrm>
-          <a:prstGeom prst="rect">
-            <a:avLst/>
-          </a:prstGeom>
-          <a:noFill/>
-          <a:ln/>
-        </p:spPr>
-        <p:txBody>
-          <a:bodyPr wrap="square" lIns="0" tIns="0" rIns="0" bIns="0" rtlCol="0" anchor="t"/>
-          <a:lstStyle/>
-          <a:p>
-            <a:pPr algn="r" indent="0" marL="0">
-              <a:buNone/>
-            </a:pPr>
-            <a:r>
-              <a:rPr lang="en-US" sz="1700" dirty="0">
-                <a:solidFill>
-                  <a:srgbClr val="3E3426"/>
-                </a:solidFill>
-                <a:latin typeface="Arial" pitchFamily="34" charset="0"/>
-                <a:ea typeface="Arial" pitchFamily="34" charset="-122"/>
-                <a:cs typeface="Arial" pitchFamily="34" charset="-120"/>
-              </a:rPr>
-              <a:t>לא סדרת הרצאות — לילה אחד, מסע אחד</a:t>
-            </a:r>
-            <a:endParaRPr lang="en-US" sz="1700" dirty="0"/>
-          </a:p>
-        </p:txBody>
-      </p:sp>
-      <p:sp>
-        <p:nvSpPr>
-          <p:cNvPr id="10" name="Shape 8"/>
-          <p:cNvSpPr/>
-          <p:nvPr/>
-        </p:nvSpPr>
-        <p:spPr>
-          <a:xfrm>
-            <a:off x="11405311" y="4425696"/>
-            <a:ext cx="91440" cy="91440"/>
-          </a:xfrm>
-          <a:prstGeom prst="ellipse">
-            <a:avLst/>
-          </a:prstGeom>
-          <a:solidFill>
-            <a:srgbClr val="C9A961"/>
-          </a:solidFill>
-          <a:ln/>
-        </p:spPr>
-      </p:sp>
-      <p:sp>
-        <p:nvSpPr>
-          <p:cNvPr id="11" name="Text 9"/>
-          <p:cNvSpPr/>
-          <p:nvPr/>
-        </p:nvSpPr>
-        <p:spPr>
-          <a:xfrm>
-            <a:off x="4846320" y="4297680"/>
-            <a:ext cx="6385255" cy="685800"/>
-          </a:xfrm>
-          <a:prstGeom prst="rect">
-            <a:avLst/>
-          </a:prstGeom>
-          <a:noFill/>
-          <a:ln/>
-        </p:spPr>
-        <p:txBody>
-          <a:bodyPr wrap="square" lIns="0" tIns="0" rIns="0" bIns="0" rtlCol="0" anchor="t"/>
-          <a:lstStyle/>
-          <a:p>
-            <a:pPr algn="r" indent="0" marL="0">
-              <a:buNone/>
-            </a:pPr>
-            <a:r>
-              <a:rPr lang="en-US" sz="1700" dirty="0">
-                <a:solidFill>
-                  <a:srgbClr val="3E3426"/>
-                </a:solidFill>
-                <a:latin typeface="Arial" pitchFamily="34" charset="0"/>
-                <a:ea typeface="Arial" pitchFamily="34" charset="-122"/>
-                <a:cs typeface="Arial" pitchFamily="34" charset="-120"/>
-              </a:rPr>
-              <a:t>שני חניכים אחראים על כל משמר (לפעמים יותר מאחד לאורך השנה)</a:t>
-            </a:r>
-            <a:endParaRPr lang="en-US" sz="1700" dirty="0"/>
-          </a:p>
-        </p:txBody>
-      </p:sp>
-      <p:sp>
-        <p:nvSpPr>
-          <p:cNvPr id="12" name="Shape 10"/>
-          <p:cNvSpPr/>
-          <p:nvPr/>
-        </p:nvSpPr>
-        <p:spPr>
-          <a:xfrm>
-            <a:off x="640080" y="1965960"/>
-            <a:ext cx="3840480" cy="3931920"/>
+            <a:off x="6278728" y="1874520"/>
+            <a:ext cx="5272888" cy="1965960"/>
           </a:xfrm>
           <a:prstGeom prst="roundRect">
             <a:avLst>
-              <a:gd name="adj" fmla="val 1905"/>
+              <a:gd name="adj" fmla="val 3721"/>
             </a:avLst>
           </a:prstGeom>
           <a:solidFill>
-            <a:srgbClr val="211D16"/>
+            <a:srgbClr val="F5F1E6"/>
           </a:solidFill>
           <a:ln w="12700">
             <a:solidFill>
@@ -7828,9 +7592,29 @@
           </a:effectLst>
         </p:spPr>
       </p:sp>
+      <p:sp>
+        <p:nvSpPr>
+          <p:cNvPr id="5" name="Shape 3"/>
+          <p:cNvSpPr/>
+          <p:nvPr/>
+        </p:nvSpPr>
+        <p:spPr>
+          <a:xfrm>
+            <a:off x="10477195" y="2125980"/>
+            <a:ext cx="777240" cy="777240"/>
+          </a:xfrm>
+          <a:prstGeom prst="ellipse">
+            <a:avLst/>
+          </a:prstGeom>
+          <a:solidFill>
+            <a:srgbClr val="C9A961"/>
+          </a:solidFill>
+          <a:ln/>
+        </p:spPr>
+      </p:sp>
       <p:pic>
         <p:nvPicPr>
-          <p:cNvPr id="13" name="Image 0" descr="/tmp/claude-0/-home-user-Ein-Prat-work/bfe443db-e493-5438-add8-ac2e37bc83f4/scratchpad/pptx-build/icons/moon.png">    </p:cNvPr>
+          <p:cNvPr id="6" name="Image 0" descr="/tmp/claude-0/-home-user-Ein-Prat-work/bfe443db-e493-5438-add8-ac2e37bc83f4/scratchpad/pptx-build/icons/layers.png">    </p:cNvPr>
           <p:cNvPicPr>
             <a:picLocks noChangeAspect="1"/>
           </p:cNvPicPr>
@@ -7844,8 +7628,8 @@
         </p:blipFill>
         <p:spPr>
           <a:xfrm>
-            <a:off x="2194560" y="2331720"/>
-            <a:ext cx="731520" cy="731520"/>
+            <a:off x="10663733" y="2312518"/>
+            <a:ext cx="404165" cy="404165"/>
           </a:xfrm>
           <a:prstGeom prst="rect">
             <a:avLst/>
@@ -7854,14 +7638,14 @@
       </p:pic>
       <p:sp>
         <p:nvSpPr>
-          <p:cNvPr id="14" name="Text 11"/>
-          <p:cNvSpPr/>
-          <p:nvPr/>
-        </p:nvSpPr>
-        <p:spPr>
-          <a:xfrm>
-            <a:off x="640080" y="3291840"/>
-            <a:ext cx="3840480" cy="548640"/>
+          <p:cNvPr id="7" name="Text 4"/>
+          <p:cNvSpPr/>
+          <p:nvPr/>
+        </p:nvSpPr>
+        <p:spPr>
+          <a:xfrm>
+            <a:off x="6553048" y="2130552"/>
+            <a:ext cx="4038448" cy="685800"/>
           </a:xfrm>
           <a:prstGeom prst="rect">
             <a:avLst/>
@@ -7873,34 +7657,34 @@
           <a:bodyPr wrap="square" lIns="0" tIns="0" rIns="0" bIns="0" rtlCol="0" anchor="ctr"/>
           <a:lstStyle/>
           <a:p>
-            <a:pPr algn="ctr" indent="0" marL="0">
+            <a:pPr algn="r" indent="0" marL="0">
               <a:buNone/>
             </a:pPr>
             <a:r>
-              <a:rPr lang="en-US" sz="3000" b="1" dirty="0">
+              <a:rPr lang="en-US" sz="1800" b="1" dirty="0">
                 <a:solidFill>
-                  <a:srgbClr val="C9A961"/>
+                  <a:srgbClr val="3E3426"/>
                 </a:solidFill>
                 <a:latin typeface="Cambria" pitchFamily="34" charset="0"/>
                 <a:ea typeface="Cambria" pitchFamily="34" charset="-122"/>
                 <a:cs typeface="Cambria" pitchFamily="34" charset="-120"/>
               </a:rPr>
-              <a:t>20:30</a:t>
+              <a:t>לילה של העמקה</a:t>
             </a:r>
-            <a:endParaRPr lang="en-US" sz="3000" dirty="0"/>
+            <a:endParaRPr lang="en-US" sz="1800" dirty="0"/>
           </a:p>
         </p:txBody>
       </p:sp>
       <p:sp>
         <p:nvSpPr>
-          <p:cNvPr id="15" name="Text 12"/>
-          <p:cNvSpPr/>
-          <p:nvPr/>
-        </p:nvSpPr>
-        <p:spPr>
-          <a:xfrm>
-            <a:off x="640080" y="3794760"/>
-            <a:ext cx="3840480" cy="320040"/>
+          <p:cNvPr id="8" name="Text 5"/>
+          <p:cNvSpPr/>
+          <p:nvPr/>
+        </p:nvSpPr>
+        <p:spPr>
+          <a:xfrm>
+            <a:off x="6553048" y="2834640"/>
+            <a:ext cx="4724248" cy="914400"/>
           </a:xfrm>
           <a:prstGeom prst="rect">
             <a:avLst/>
@@ -7909,37 +7693,118 @@
           <a:ln/>
         </p:spPr>
         <p:txBody>
-          <a:bodyPr wrap="square" lIns="0" tIns="0" rIns="0" bIns="0" rtlCol="0" anchor="ctr"/>
+          <a:bodyPr wrap="square" lIns="0" tIns="0" rIns="0" bIns="0" rtlCol="0" anchor="t"/>
           <a:lstStyle/>
           <a:p>
-            <a:pPr algn="ctr" indent="0" marL="0">
+            <a:pPr algn="r" indent="0" marL="0">
+              <a:lnSpc>
+                <a:spcPct val="120000"/>
+              </a:lnSpc>
               <a:buNone/>
             </a:pPr>
             <a:r>
-              <a:rPr lang="en-US" sz="1300" dirty="0">
+              <a:rPr lang="en-US" sz="1350" dirty="0">
                 <a:solidFill>
-                  <a:srgbClr val="9C917A"/>
+                  <a:srgbClr val="6E6250"/>
                 </a:solidFill>
                 <a:latin typeface="Arial" pitchFamily="34" charset="0"/>
                 <a:ea typeface="Arial" pitchFamily="34" charset="-122"/>
                 <a:cs typeface="Arial" pitchFamily="34" charset="-120"/>
               </a:rPr>
-              <a:t>עד</a:t>
+              <a:t>לא עוד שיעור — צלילה שלמה לתוך נושא אחד, הרבה מעבר למה שנלמד ביום-יום.</a:t>
             </a:r>
-            <a:endParaRPr lang="en-US" sz="1300" dirty="0"/>
+            <a:endParaRPr lang="en-US" sz="1350" dirty="0"/>
           </a:p>
         </p:txBody>
       </p:sp>
       <p:sp>
         <p:nvSpPr>
-          <p:cNvPr id="16" name="Text 13"/>
-          <p:cNvSpPr/>
-          <p:nvPr/>
-        </p:nvSpPr>
-        <p:spPr>
-          <a:xfrm>
-            <a:off x="640080" y="4114800"/>
-            <a:ext cx="3840480" cy="548640"/>
+          <p:cNvPr id="9" name="Shape 6"/>
+          <p:cNvSpPr/>
+          <p:nvPr/>
+        </p:nvSpPr>
+        <p:spPr>
+          <a:xfrm>
+            <a:off x="640080" y="1874520"/>
+            <a:ext cx="5272888" cy="1965960"/>
+          </a:xfrm>
+          <a:prstGeom prst="roundRect">
+            <a:avLst>
+              <a:gd name="adj" fmla="val 3721"/>
+            </a:avLst>
+          </a:prstGeom>
+          <a:solidFill>
+            <a:srgbClr val="F5F1E6"/>
+          </a:solidFill>
+          <a:ln w="12700">
+            <a:solidFill>
+              <a:srgbClr val="E4DDCB"/>
+            </a:solidFill>
+            <a:prstDash val="solid"/>
+          </a:ln>
+          <a:effectLst>
+            <a:outerShdw sx="100000" sy="100000" kx="0" ky="0" algn="bl" rotWithShape="0" blurRad="101600" dist="25400" dir="5400000">
+              <a:srgbClr val="000000">
+                <a:alpha val="12000"/>
+              </a:srgbClr>
+            </a:outerShdw>
+          </a:effectLst>
+        </p:spPr>
+      </p:sp>
+      <p:sp>
+        <p:nvSpPr>
+          <p:cNvPr id="10" name="Shape 7"/>
+          <p:cNvSpPr/>
+          <p:nvPr/>
+        </p:nvSpPr>
+        <p:spPr>
+          <a:xfrm>
+            <a:off x="4838548" y="2125980"/>
+            <a:ext cx="777240" cy="777240"/>
+          </a:xfrm>
+          <a:prstGeom prst="ellipse">
+            <a:avLst/>
+          </a:prstGeom>
+          <a:solidFill>
+            <a:srgbClr val="3F6480"/>
+          </a:solidFill>
+          <a:ln/>
+        </p:spPr>
+      </p:sp>
+      <p:pic>
+        <p:nvPicPr>
+          <p:cNvPr id="11" name="Image 1" descr="/tmp/claude-0/-home-user-Ein-Prat-work/bfe443db-e493-5438-add8-ac2e37bc83f4/scratchpad/pptx-build/icons/bookOpen.png">    </p:cNvPr>
+          <p:cNvPicPr>
+            <a:picLocks noChangeAspect="1"/>
+          </p:cNvPicPr>
+          <p:nvPr/>
+        </p:nvPicPr>
+        <p:blipFill>
+          <a:blip r:embed="rId2"/>
+          <a:stretch>
+            <a:fillRect/>
+          </a:stretch>
+        </p:blipFill>
+        <p:spPr>
+          <a:xfrm>
+            <a:off x="5025085" y="2312518"/>
+            <a:ext cx="404165" cy="404165"/>
+          </a:xfrm>
+          <a:prstGeom prst="rect">
+            <a:avLst/>
+          </a:prstGeom>
+        </p:spPr>
+      </p:pic>
+      <p:sp>
+        <p:nvSpPr>
+          <p:cNvPr id="12" name="Text 8"/>
+          <p:cNvSpPr/>
+          <p:nvPr/>
+        </p:nvSpPr>
+        <p:spPr>
+          <a:xfrm>
+            <a:off x="914400" y="2130552"/>
+            <a:ext cx="4038448" cy="685800"/>
           </a:xfrm>
           <a:prstGeom prst="rect">
             <a:avLst/>
@@ -7951,34 +7816,34 @@
           <a:bodyPr wrap="square" lIns="0" tIns="0" rIns="0" bIns="0" rtlCol="0" anchor="ctr"/>
           <a:lstStyle/>
           <a:p>
-            <a:pPr algn="ctr" indent="0" marL="0">
+            <a:pPr algn="r" indent="0" marL="0">
               <a:buNone/>
             </a:pPr>
             <a:r>
-              <a:rPr lang="en-US" sz="3000" b="1" dirty="0">
+              <a:rPr lang="en-US" sz="1800" b="1" dirty="0">
                 <a:solidFill>
-                  <a:srgbClr val="C9A961"/>
+                  <a:srgbClr val="3E3426"/>
                 </a:solidFill>
                 <a:latin typeface="Cambria" pitchFamily="34" charset="0"/>
                 <a:ea typeface="Cambria" pitchFamily="34" charset="-122"/>
                 <a:cs typeface="Cambria" pitchFamily="34" charset="-120"/>
               </a:rPr>
-              <a:t>02:00+</a:t>
+              <a:t>עומק חדש בתכנים מוכרים</a:t>
             </a:r>
-            <a:endParaRPr lang="en-US" sz="3000" dirty="0"/>
+            <a:endParaRPr lang="en-US" sz="1800" dirty="0"/>
           </a:p>
         </p:txBody>
       </p:sp>
       <p:sp>
         <p:nvSpPr>
-          <p:cNvPr id="17" name="Text 14"/>
-          <p:cNvSpPr/>
-          <p:nvPr/>
-        </p:nvSpPr>
-        <p:spPr>
-          <a:xfrm>
-            <a:off x="640080" y="5394960"/>
-            <a:ext cx="3840480" cy="365760"/>
+          <p:cNvPr id="13" name="Text 9"/>
+          <p:cNvSpPr/>
+          <p:nvPr/>
+        </p:nvSpPr>
+        <p:spPr>
+          <a:xfrm>
+            <a:off x="914400" y="2834640"/>
+            <a:ext cx="4724248" cy="914400"/>
           </a:xfrm>
           <a:prstGeom prst="rect">
             <a:avLst/>
@@ -7987,30 +7852,351 @@
           <a:ln/>
         </p:spPr>
         <p:txBody>
-          <a:bodyPr wrap="square" lIns="0" tIns="0" rIns="0" bIns="0" rtlCol="0" anchor="ctr"/>
+          <a:bodyPr wrap="square" lIns="0" tIns="0" rIns="0" bIns="0" rtlCol="0" anchor="t"/>
           <a:lstStyle/>
           <a:p>
-            <a:pPr algn="ctr" indent="0" marL="0">
+            <a:pPr algn="r" indent="0" marL="0">
+              <a:lnSpc>
+                <a:spcPct val="120000"/>
+              </a:lnSpc>
               <a:buNone/>
             </a:pPr>
             <a:r>
-              <a:rPr lang="en-US" sz="1100" dirty="0">
+              <a:rPr lang="en-US" sz="1350" dirty="0">
                 <a:solidFill>
-                  <a:srgbClr val="9C917A"/>
+                  <a:srgbClr val="6E6250"/>
                 </a:solidFill>
                 <a:latin typeface="Arial" pitchFamily="34" charset="0"/>
                 <a:ea typeface="Arial" pitchFamily="34" charset="-122"/>
                 <a:cs typeface="Arial" pitchFamily="34" charset="-120"/>
               </a:rPr>
-              <a:t>(משתנה ממשמר למשמר)</a:t>
+              <a:t>הזדמנות לחזור אל מה שכבר נלמד בשיעורים הרגילים, ולגלות בו רבדים שלא נחשפו שם.</a:t>
             </a:r>
-            <a:endParaRPr lang="en-US" sz="1100" dirty="0"/>
+            <a:endParaRPr lang="en-US" sz="1350" dirty="0"/>
           </a:p>
         </p:txBody>
       </p:sp>
       <p:sp>
         <p:nvSpPr>
-          <p:cNvPr id="18" name="Text 15"/>
+          <p:cNvPr id="14" name="Shape 10"/>
+          <p:cNvSpPr/>
+          <p:nvPr/>
+        </p:nvSpPr>
+        <p:spPr>
+          <a:xfrm>
+            <a:off x="6278728" y="4160520"/>
+            <a:ext cx="5272888" cy="1965960"/>
+          </a:xfrm>
+          <a:prstGeom prst="roundRect">
+            <a:avLst>
+              <a:gd name="adj" fmla="val 3721"/>
+            </a:avLst>
+          </a:prstGeom>
+          <a:solidFill>
+            <a:srgbClr val="F5F1E6"/>
+          </a:solidFill>
+          <a:ln w="12700">
+            <a:solidFill>
+              <a:srgbClr val="E4DDCB"/>
+            </a:solidFill>
+            <a:prstDash val="solid"/>
+          </a:ln>
+          <a:effectLst>
+            <a:outerShdw sx="100000" sy="100000" kx="0" ky="0" algn="bl" rotWithShape="0" blurRad="101600" dist="25400" dir="5400000">
+              <a:srgbClr val="000000">
+                <a:alpha val="12000"/>
+              </a:srgbClr>
+            </a:outerShdw>
+          </a:effectLst>
+        </p:spPr>
+      </p:sp>
+      <p:sp>
+        <p:nvSpPr>
+          <p:cNvPr id="15" name="Shape 11"/>
+          <p:cNvSpPr/>
+          <p:nvPr/>
+        </p:nvSpPr>
+        <p:spPr>
+          <a:xfrm>
+            <a:off x="10477195" y="4411980"/>
+            <a:ext cx="777240" cy="777240"/>
+          </a:xfrm>
+          <a:prstGeom prst="ellipse">
+            <a:avLst/>
+          </a:prstGeom>
+          <a:solidFill>
+            <a:srgbClr val="5E7B47"/>
+          </a:solidFill>
+          <a:ln/>
+        </p:spPr>
+      </p:sp>
+      <p:pic>
+        <p:nvPicPr>
+          <p:cNvPr id="16" name="Image 2" descr="/tmp/claude-0/-home-user-Ein-Prat-work/bfe443db-e493-5438-add8-ac2e37bc83f4/scratchpad/pptx-build/icons/edit.png">    </p:cNvPr>
+          <p:cNvPicPr>
+            <a:picLocks noChangeAspect="1"/>
+          </p:cNvPicPr>
+          <p:nvPr/>
+        </p:nvPicPr>
+        <p:blipFill>
+          <a:blip r:embed="rId3"/>
+          <a:stretch>
+            <a:fillRect/>
+          </a:stretch>
+        </p:blipFill>
+        <p:spPr>
+          <a:xfrm>
+            <a:off x="10663733" y="4598518"/>
+            <a:ext cx="404165" cy="404165"/>
+          </a:xfrm>
+          <a:prstGeom prst="rect">
+            <a:avLst/>
+          </a:prstGeom>
+        </p:spPr>
+      </p:pic>
+      <p:sp>
+        <p:nvSpPr>
+          <p:cNvPr id="17" name="Text 12"/>
+          <p:cNvSpPr/>
+          <p:nvPr/>
+        </p:nvSpPr>
+        <p:spPr>
+          <a:xfrm>
+            <a:off x="6553048" y="4416552"/>
+            <a:ext cx="4038448" cy="685800"/>
+          </a:xfrm>
+          <a:prstGeom prst="rect">
+            <a:avLst/>
+          </a:prstGeom>
+          <a:noFill/>
+          <a:ln/>
+        </p:spPr>
+        <p:txBody>
+          <a:bodyPr wrap="square" lIns="0" tIns="0" rIns="0" bIns="0" rtlCol="0" anchor="ctr"/>
+          <a:lstStyle/>
+          <a:p>
+            <a:pPr algn="r" indent="0" marL="0">
+              <a:buNone/>
+            </a:pPr>
+            <a:r>
+              <a:rPr lang="en-US" sz="1800" b="1" dirty="0">
+                <a:solidFill>
+                  <a:srgbClr val="3E3426"/>
+                </a:solidFill>
+                <a:latin typeface="Cambria" pitchFamily="34" charset="0"/>
+                <a:ea typeface="Cambria" pitchFamily="34" charset="-122"/>
+                <a:cs typeface="Cambria" pitchFamily="34" charset="-120"/>
+              </a:rPr>
+              <a:t>כולו בידיים שלכם</a:t>
+            </a:r>
+            <a:endParaRPr lang="en-US" sz="1800" dirty="0"/>
+          </a:p>
+        </p:txBody>
+      </p:sp>
+      <p:sp>
+        <p:nvSpPr>
+          <p:cNvPr id="18" name="Text 13"/>
+          <p:cNvSpPr/>
+          <p:nvPr/>
+        </p:nvSpPr>
+        <p:spPr>
+          <a:xfrm>
+            <a:off x="6553048" y="5120640"/>
+            <a:ext cx="4724248" cy="914400"/>
+          </a:xfrm>
+          <a:prstGeom prst="rect">
+            <a:avLst/>
+          </a:prstGeom>
+          <a:noFill/>
+          <a:ln/>
+        </p:spPr>
+        <p:txBody>
+          <a:bodyPr wrap="square" lIns="0" tIns="0" rIns="0" bIns="0" rtlCol="0" anchor="t"/>
+          <a:lstStyle/>
+          <a:p>
+            <a:pPr algn="r" indent="0" marL="0">
+              <a:lnSpc>
+                <a:spcPct val="120000"/>
+              </a:lnSpc>
+              <a:buNone/>
+            </a:pPr>
+            <a:r>
+              <a:rPr lang="en-US" sz="1350" dirty="0">
+                <a:solidFill>
+                  <a:srgbClr val="6E6250"/>
+                </a:solidFill>
+                <a:latin typeface="Arial" pitchFamily="34" charset="0"/>
+                <a:ea typeface="Arial" pitchFamily="34" charset="-122"/>
+                <a:cs typeface="Arial" pitchFamily="34" charset="-120"/>
+              </a:rPr>
+              <a:t>מהרעיון ועד לרגע האחרון בלילה — הבנייה של המשמר היא באחריותכם המלאה.</a:t>
+            </a:r>
+            <a:endParaRPr lang="en-US" sz="1350" dirty="0"/>
+          </a:p>
+        </p:txBody>
+      </p:sp>
+      <p:sp>
+        <p:nvSpPr>
+          <p:cNvPr id="19" name="Shape 14"/>
+          <p:cNvSpPr/>
+          <p:nvPr/>
+        </p:nvSpPr>
+        <p:spPr>
+          <a:xfrm>
+            <a:off x="640080" y="4160520"/>
+            <a:ext cx="5272888" cy="1965960"/>
+          </a:xfrm>
+          <a:prstGeom prst="roundRect">
+            <a:avLst>
+              <a:gd name="adj" fmla="val 3721"/>
+            </a:avLst>
+          </a:prstGeom>
+          <a:solidFill>
+            <a:srgbClr val="F5F1E6"/>
+          </a:solidFill>
+          <a:ln w="12700">
+            <a:solidFill>
+              <a:srgbClr val="E4DDCB"/>
+            </a:solidFill>
+            <a:prstDash val="solid"/>
+          </a:ln>
+          <a:effectLst>
+            <a:outerShdw sx="100000" sy="100000" kx="0" ky="0" algn="bl" rotWithShape="0" blurRad="101600" dist="25400" dir="5400000">
+              <a:srgbClr val="000000">
+                <a:alpha val="12000"/>
+              </a:srgbClr>
+            </a:outerShdw>
+          </a:effectLst>
+        </p:spPr>
+      </p:sp>
+      <p:sp>
+        <p:nvSpPr>
+          <p:cNvPr id="20" name="Shape 15"/>
+          <p:cNvSpPr/>
+          <p:nvPr/>
+        </p:nvSpPr>
+        <p:spPr>
+          <a:xfrm>
+            <a:off x="4838548" y="4411980"/>
+            <a:ext cx="777240" cy="777240"/>
+          </a:xfrm>
+          <a:prstGeom prst="ellipse">
+            <a:avLst/>
+          </a:prstGeom>
+          <a:solidFill>
+            <a:srgbClr val="9C7B34"/>
+          </a:solidFill>
+          <a:ln/>
+        </p:spPr>
+      </p:sp>
+      <p:pic>
+        <p:nvPicPr>
+          <p:cNvPr id="21" name="Image 3" descr="/tmp/claude-0/-home-user-Ein-Prat-work/bfe443db-e493-5438-add8-ac2e37bc83f4/scratchpad/pptx-build/icons/award.png">    </p:cNvPr>
+          <p:cNvPicPr>
+            <a:picLocks noChangeAspect="1"/>
+          </p:cNvPicPr>
+          <p:nvPr/>
+        </p:nvPicPr>
+        <p:blipFill>
+          <a:blip r:embed="rId4"/>
+          <a:stretch>
+            <a:fillRect/>
+          </a:stretch>
+        </p:blipFill>
+        <p:spPr>
+          <a:xfrm>
+            <a:off x="5025085" y="4598518"/>
+            <a:ext cx="404165" cy="404165"/>
+          </a:xfrm>
+          <a:prstGeom prst="rect">
+            <a:avLst/>
+          </a:prstGeom>
+        </p:spPr>
+      </p:pic>
+      <p:sp>
+        <p:nvSpPr>
+          <p:cNvPr id="22" name="Text 16"/>
+          <p:cNvSpPr/>
+          <p:nvPr/>
+        </p:nvSpPr>
+        <p:spPr>
+          <a:xfrm>
+            <a:off x="914400" y="4416552"/>
+            <a:ext cx="4038448" cy="685800"/>
+          </a:xfrm>
+          <a:prstGeom prst="rect">
+            <a:avLst/>
+          </a:prstGeom>
+          <a:noFill/>
+          <a:ln/>
+        </p:spPr>
+        <p:txBody>
+          <a:bodyPr wrap="square" lIns="0" tIns="0" rIns="0" bIns="0" rtlCol="0" anchor="ctr"/>
+          <a:lstStyle/>
+          <a:p>
+            <a:pPr algn="r" indent="0" marL="0">
+              <a:buNone/>
+            </a:pPr>
+            <a:r>
+              <a:rPr lang="en-US" sz="1800" b="1" dirty="0">
+                <a:solidFill>
+                  <a:srgbClr val="3E3426"/>
+                </a:solidFill>
+                <a:latin typeface="Cambria" pitchFamily="34" charset="0"/>
+                <a:ea typeface="Cambria" pitchFamily="34" charset="-122"/>
+                <a:cs typeface="Cambria" pitchFamily="34" charset="-120"/>
+              </a:rPr>
+              <a:t>הזדמנות אמיתית להשפיע</a:t>
+            </a:r>
+            <a:endParaRPr lang="en-US" sz="1800" dirty="0"/>
+          </a:p>
+        </p:txBody>
+      </p:sp>
+      <p:sp>
+        <p:nvSpPr>
+          <p:cNvPr id="23" name="Text 17"/>
+          <p:cNvSpPr/>
+          <p:nvPr/>
+        </p:nvSpPr>
+        <p:spPr>
+          <a:xfrm>
+            <a:off x="914400" y="5120640"/>
+            <a:ext cx="4724248" cy="914400"/>
+          </a:xfrm>
+          <a:prstGeom prst="rect">
+            <a:avLst/>
+          </a:prstGeom>
+          <a:noFill/>
+          <a:ln/>
+        </p:spPr>
+        <p:txBody>
+          <a:bodyPr wrap="square" lIns="0" tIns="0" rIns="0" bIns="0" rtlCol="0" anchor="t"/>
+          <a:lstStyle/>
+          <a:p>
+            <a:pPr algn="r" indent="0" marL="0">
+              <a:lnSpc>
+                <a:spcPct val="120000"/>
+              </a:lnSpc>
+              <a:buNone/>
+            </a:pPr>
+            <a:r>
+              <a:rPr lang="en-US" sz="1350" dirty="0">
+                <a:solidFill>
+                  <a:srgbClr val="6E6250"/>
+                </a:solidFill>
+                <a:latin typeface="Arial" pitchFamily="34" charset="0"/>
+                <a:ea typeface="Arial" pitchFamily="34" charset="-122"/>
+                <a:cs typeface="Arial" pitchFamily="34" charset="-120"/>
+              </a:rPr>
+              <a:t>משמר טוב לא רק מעשיר את מי שנמצא בו — הוא מעלה את רמת הלמידה של המדרשה כולה.</a:t>
+            </a:r>
+            <a:endParaRPr lang="en-US" sz="1350" dirty="0"/>
+          </a:p>
+        </p:txBody>
+      </p:sp>
+      <p:sp>
+        <p:nvSpPr>
+          <p:cNvPr id="24" name="Text 18"/>
           <p:cNvSpPr/>
           <p:nvPr/>
         </p:nvSpPr>
@@ -8049,7 +8235,7 @@
       </p:sp>
       <p:sp>
         <p:nvSpPr>
-          <p:cNvPr id="19" name="Text 16"/>
+          <p:cNvPr id="25" name="Text 19"/>
           <p:cNvSpPr/>
           <p:nvPr/>
         </p:nvSpPr>
@@ -8204,12 +8390,12 @@
         </p:nvSpPr>
         <p:spPr>
           <a:xfrm>
-            <a:off x="9063761" y="1965960"/>
-            <a:ext cx="2487854" cy="3291840"/>
+            <a:off x="6278728" y="1828800"/>
+            <a:ext cx="5272888" cy="2011680"/>
           </a:xfrm>
           <a:prstGeom prst="roundRect">
             <a:avLst>
-              <a:gd name="adj" fmla="val 2940"/>
+              <a:gd name="adj" fmla="val 3636"/>
             </a:avLst>
           </a:prstGeom>
           <a:solidFill>
@@ -8238,8 +8424,8 @@
         </p:nvSpPr>
         <p:spPr>
           <a:xfrm>
-            <a:off x="9919068" y="2491740"/>
-            <a:ext cx="777240" cy="777240"/>
+            <a:off x="10655503" y="2066544"/>
+            <a:ext cx="658368" cy="658368"/>
           </a:xfrm>
           <a:prstGeom prst="ellipse">
             <a:avLst/>
@@ -8266,8 +8452,8 @@
         </p:blipFill>
         <p:spPr>
           <a:xfrm>
-            <a:off x="10105606" y="2678278"/>
-            <a:ext cx="404165" cy="404165"/>
+            <a:off x="10813512" y="2224552"/>
+            <a:ext cx="342351" cy="342351"/>
           </a:xfrm>
           <a:prstGeom prst="rect">
             <a:avLst/>
@@ -8282,7 +8468,7 @@
         </p:nvSpPr>
         <p:spPr>
           <a:xfrm>
-            <a:off x="11048695" y="2148840"/>
+            <a:off x="6415888" y="1938528"/>
             <a:ext cx="365760" cy="365760"/>
           </a:xfrm>
           <a:prstGeom prst="rect">
@@ -8299,7 +8485,7 @@
               <a:buNone/>
             </a:pPr>
             <a:r>
-              <a:rPr lang="en-US" sz="1600" b="1" dirty="0">
+              <a:rPr lang="en-US" sz="1500" b="1" dirty="0">
                 <a:solidFill>
                   <a:srgbClr val="3F6480"/>
                 </a:solidFill>
@@ -8309,7 +8495,7 @@
               </a:rPr>
               <a:t>1</a:t>
             </a:r>
-            <a:endParaRPr lang="en-US" sz="1600" dirty="0"/>
+            <a:endParaRPr lang="en-US" sz="1500" dirty="0"/>
           </a:p>
         </p:txBody>
       </p:sp>
@@ -8321,8 +8507,8 @@
         </p:nvSpPr>
         <p:spPr>
           <a:xfrm>
-            <a:off x="9173489" y="3474720"/>
-            <a:ext cx="2268398" cy="640080"/>
+            <a:off x="6553048" y="2029968"/>
+            <a:ext cx="4221328" cy="457200"/>
           </a:xfrm>
           <a:prstGeom prst="rect">
             <a:avLst/>
@@ -8334,7 +8520,7 @@
           <a:bodyPr wrap="square" lIns="0" tIns="0" rIns="0" bIns="0" rtlCol="0" anchor="ctr"/>
           <a:lstStyle/>
           <a:p>
-            <a:pPr algn="ctr" indent="0" marL="0">
+            <a:pPr algn="r" indent="0" marL="0">
               <a:buNone/>
             </a:pPr>
             <a:r>
@@ -8360,8 +8546,8 @@
         </p:nvSpPr>
         <p:spPr>
           <a:xfrm>
-            <a:off x="9200921" y="4114800"/>
-            <a:ext cx="2213534" cy="822960"/>
+            <a:off x="6553048" y="2542032"/>
+            <a:ext cx="4724248" cy="320040"/>
           </a:xfrm>
           <a:prstGeom prst="rect">
             <a:avLst/>
@@ -8373,7 +8559,21 @@
           <a:bodyPr wrap="square" lIns="0" tIns="0" rIns="0" bIns="0" rtlCol="0" anchor="ctr"/>
           <a:lstStyle/>
           <a:p>
-            <a:pPr algn="ctr" indent="0" marL="0">
+            <a:pPr algn="r" indent="0" marL="0">
+              <a:buNone/>
+            </a:pPr>
+            <a:r>
+              <a:rPr lang="en-US" sz="1250" b="1" dirty="0">
+                <a:solidFill>
+                  <a:srgbClr val="3F6480"/>
+                </a:solidFill>
+                <a:latin typeface="Arial" pitchFamily="34" charset="0"/>
+                <a:ea typeface="Arial" pitchFamily="34" charset="-122"/>
+                <a:cs typeface="Arial" pitchFamily="34" charset="-120"/>
+              </a:rPr>
+              <a:t>אנרגיה:  </a:t>
+            </a:r>
+            <a:pPr algn="r" indent="0" marL="0">
               <a:buNone/>
             </a:pPr>
             <a:r>
@@ -8385,7 +8585,7 @@
                 <a:ea typeface="Arial" pitchFamily="34" charset="-122"/>
                 <a:cs typeface="Arial" pitchFamily="34" charset="-120"/>
               </a:rPr>
-              <a:t>שכל, עובדות, "קר"</a:t>
+              <a:t>חדה, אקדמית, קרה</a:t>
             </a:r>
             <a:endParaRPr lang="en-US" sz="1250" dirty="0"/>
           </a:p>
@@ -8393,18 +8593,77 @@
       </p:sp>
       <p:sp>
         <p:nvSpPr>
-          <p:cNvPr id="10" name="Shape 7"/>
-          <p:cNvSpPr/>
-          <p:nvPr/>
-        </p:nvSpPr>
-        <p:spPr>
-          <a:xfrm>
-            <a:off x="6255868" y="1965960"/>
-            <a:ext cx="2487854" cy="3291840"/>
+          <p:cNvPr id="10" name="Text 7"/>
+          <p:cNvSpPr/>
+          <p:nvPr/>
+        </p:nvSpPr>
+        <p:spPr>
+          <a:xfrm>
+            <a:off x="6553048" y="2880360"/>
+            <a:ext cx="4724248" cy="868680"/>
+          </a:xfrm>
+          <a:prstGeom prst="rect">
+            <a:avLst/>
+          </a:prstGeom>
+          <a:noFill/>
+          <a:ln/>
+        </p:spPr>
+        <p:txBody>
+          <a:bodyPr wrap="square" lIns="0" tIns="0" rIns="0" bIns="0" rtlCol="0" anchor="t"/>
+          <a:lstStyle/>
+          <a:p>
+            <a:pPr algn="r" indent="0" marL="0">
+              <a:lnSpc>
+                <a:spcPct val="120000"/>
+              </a:lnSpc>
+              <a:buNone/>
+            </a:pPr>
+            <a:r>
+              <a:rPr lang="en-US" sz="1250" b="1" dirty="0">
+                <a:solidFill>
+                  <a:srgbClr val="3F6480"/>
+                </a:solidFill>
+                <a:latin typeface="Arial" pitchFamily="34" charset="0"/>
+                <a:ea typeface="Arial" pitchFamily="34" charset="-122"/>
+                <a:cs typeface="Arial" pitchFamily="34" charset="-120"/>
+              </a:rPr>
+              <a:t>מטרה:  </a:t>
+            </a:r>
+            <a:pPr algn="r" indent="0" marL="0">
+              <a:lnSpc>
+                <a:spcPct val="120000"/>
+              </a:lnSpc>
+              <a:buNone/>
+            </a:pPr>
+            <a:r>
+              <a:rPr lang="en-US" sz="1250" dirty="0">
+                <a:solidFill>
+                  <a:srgbClr val="3E3426"/>
+                </a:solidFill>
+                <a:latin typeface="Arial" pitchFamily="34" charset="0"/>
+                <a:ea typeface="Arial" pitchFamily="34" charset="-122"/>
+                <a:cs typeface="Arial" pitchFamily="34" charset="-120"/>
+              </a:rPr>
+              <a:t>לבסס עובדות, הקשר ההיסטורי וההגדרות — לפזר את הערפל לפני שצוללים לעומק.</a:t>
+            </a:r>
+            <a:endParaRPr lang="en-US" sz="1250" dirty="0"/>
+          </a:p>
+        </p:txBody>
+      </p:sp>
+      <p:sp>
+        <p:nvSpPr>
+          <p:cNvPr id="11" name="Shape 8"/>
+          <p:cNvSpPr/>
+          <p:nvPr/>
+        </p:nvSpPr>
+        <p:spPr>
+          <a:xfrm>
+            <a:off x="640080" y="1828800"/>
+            <a:ext cx="5272888" cy="2011680"/>
           </a:xfrm>
           <a:prstGeom prst="roundRect">
             <a:avLst>
-              <a:gd name="adj" fmla="val 2940"/>
+              <a:gd name="adj" fmla="val 3636"/>
             </a:avLst>
           </a:prstGeom>
           <a:solidFill>
@@ -8427,14 +8686,14 @@
       </p:sp>
       <p:sp>
         <p:nvSpPr>
-          <p:cNvPr id="11" name="Shape 8"/>
-          <p:cNvSpPr/>
-          <p:nvPr/>
-        </p:nvSpPr>
-        <p:spPr>
-          <a:xfrm>
-            <a:off x="7111175" y="2491740"/>
-            <a:ext cx="777240" cy="777240"/>
+          <p:cNvPr id="12" name="Shape 9"/>
+          <p:cNvSpPr/>
+          <p:nvPr/>
+        </p:nvSpPr>
+        <p:spPr>
+          <a:xfrm>
+            <a:off x="5016856" y="2066544"/>
+            <a:ext cx="658368" cy="658368"/>
           </a:xfrm>
           <a:prstGeom prst="ellipse">
             <a:avLst/>
@@ -8447,7 +8706,7 @@
       </p:sp>
       <p:pic>
         <p:nvPicPr>
-          <p:cNvPr id="12" name="Image 1" descr="/tmp/claude-0/-home-user-Ein-Prat-work/bfe443db-e493-5438-add8-ac2e37bc83f4/scratchpad/pptx-build/icons/alertCircle.png">    </p:cNvPr>
+          <p:cNvPr id="13" name="Image 1" descr="/tmp/claude-0/-home-user-Ein-Prat-work/bfe443db-e493-5438-add8-ac2e37bc83f4/scratchpad/pptx-build/icons/alertCircle.png">    </p:cNvPr>
           <p:cNvPicPr>
             <a:picLocks noChangeAspect="1"/>
           </p:cNvPicPr>
@@ -8461,8 +8720,8 @@
         </p:blipFill>
         <p:spPr>
           <a:xfrm>
-            <a:off x="7297712" y="2678278"/>
-            <a:ext cx="404165" cy="404165"/>
+            <a:off x="5174864" y="2224552"/>
+            <a:ext cx="342351" cy="342351"/>
           </a:xfrm>
           <a:prstGeom prst="rect">
             <a:avLst/>
@@ -8471,13 +8730,13 @@
       </p:pic>
       <p:sp>
         <p:nvSpPr>
-          <p:cNvPr id="13" name="Text 9"/>
-          <p:cNvSpPr/>
-          <p:nvPr/>
-        </p:nvSpPr>
-        <p:spPr>
-          <a:xfrm>
-            <a:off x="8240801" y="2148840"/>
+          <p:cNvPr id="14" name="Text 10"/>
+          <p:cNvSpPr/>
+          <p:nvPr/>
+        </p:nvSpPr>
+        <p:spPr>
+          <a:xfrm>
+            <a:off x="777240" y="1938528"/>
             <a:ext cx="365760" cy="365760"/>
           </a:xfrm>
           <a:prstGeom prst="rect">
@@ -8494,7 +8753,7 @@
               <a:buNone/>
             </a:pPr>
             <a:r>
-              <a:rPr lang="en-US" sz="1600" b="1" dirty="0">
+              <a:rPr lang="en-US" sz="1500" b="1" dirty="0">
                 <a:solidFill>
                   <a:srgbClr val="5B6E8C"/>
                 </a:solidFill>
@@ -8504,20 +8763,20 @@
               </a:rPr>
               <a:t>2</a:t>
             </a:r>
-            <a:endParaRPr lang="en-US" sz="1600" dirty="0"/>
+            <a:endParaRPr lang="en-US" sz="1500" dirty="0"/>
           </a:p>
         </p:txBody>
       </p:sp>
       <p:sp>
         <p:nvSpPr>
-          <p:cNvPr id="14" name="Text 10"/>
-          <p:cNvSpPr/>
-          <p:nvPr/>
-        </p:nvSpPr>
-        <p:spPr>
-          <a:xfrm>
-            <a:off x="6365596" y="3474720"/>
-            <a:ext cx="2268398" cy="640080"/>
+          <p:cNvPr id="15" name="Text 11"/>
+          <p:cNvSpPr/>
+          <p:nvPr/>
+        </p:nvSpPr>
+        <p:spPr>
+          <a:xfrm>
+            <a:off x="914400" y="2029968"/>
+            <a:ext cx="4221328" cy="457200"/>
           </a:xfrm>
           <a:prstGeom prst="rect">
             <a:avLst/>
@@ -8529,7 +8788,7 @@
           <a:bodyPr wrap="square" lIns="0" tIns="0" rIns="0" bIns="0" rtlCol="0" anchor="ctr"/>
           <a:lstStyle/>
           <a:p>
-            <a:pPr algn="ctr" indent="0" marL="0">
+            <a:pPr algn="r" indent="0" marL="0">
               <a:buNone/>
             </a:pPr>
             <a:r>
@@ -8549,14 +8808,14 @@
       </p:sp>
       <p:sp>
         <p:nvSpPr>
-          <p:cNvPr id="15" name="Text 11"/>
-          <p:cNvSpPr/>
-          <p:nvPr/>
-        </p:nvSpPr>
-        <p:spPr>
-          <a:xfrm>
-            <a:off x="6393028" y="4114800"/>
-            <a:ext cx="2213534" cy="822960"/>
+          <p:cNvPr id="16" name="Text 12"/>
+          <p:cNvSpPr/>
+          <p:nvPr/>
+        </p:nvSpPr>
+        <p:spPr>
+          <a:xfrm>
+            <a:off x="914400" y="2542032"/>
+            <a:ext cx="4724248" cy="320040"/>
           </a:xfrm>
           <a:prstGeom prst="rect">
             <a:avLst/>
@@ -8568,7 +8827,21 @@
           <a:bodyPr wrap="square" lIns="0" tIns="0" rIns="0" bIns="0" rtlCol="0" anchor="ctr"/>
           <a:lstStyle/>
           <a:p>
-            <a:pPr algn="ctr" indent="0" marL="0">
+            <a:pPr algn="r" indent="0" marL="0">
+              <a:buNone/>
+            </a:pPr>
+            <a:r>
+              <a:rPr lang="en-US" sz="1250" b="1" dirty="0">
+                <a:solidFill>
+                  <a:srgbClr val="5B6E8C"/>
+                </a:solidFill>
+                <a:latin typeface="Arial" pitchFamily="34" charset="0"/>
+                <a:ea typeface="Arial" pitchFamily="34" charset="-122"/>
+                <a:cs typeface="Arial" pitchFamily="34" charset="-120"/>
+              </a:rPr>
+              <a:t>אנרגיה:  </a:t>
+            </a:r>
+            <a:pPr algn="r" indent="0" marL="0">
               <a:buNone/>
             </a:pPr>
             <a:r>
@@ -8580,7 +8853,7 @@
                 <a:ea typeface="Arial" pitchFamily="34" charset="-122"/>
                 <a:cs typeface="Arial" pitchFamily="34" charset="-120"/>
               </a:rPr>
-              <a:t>הדילמה המרכזית</a:t>
+              <a:t>פילוסופית, מתוחה, עמוקה</a:t>
             </a:r>
             <a:endParaRPr lang="en-US" sz="1250" dirty="0"/>
           </a:p>
@@ -8588,18 +8861,77 @@
       </p:sp>
       <p:sp>
         <p:nvSpPr>
-          <p:cNvPr id="16" name="Shape 12"/>
-          <p:cNvSpPr/>
-          <p:nvPr/>
-        </p:nvSpPr>
-        <p:spPr>
-          <a:xfrm>
-            <a:off x="3447974" y="1965960"/>
-            <a:ext cx="2487854" cy="3291840"/>
+          <p:cNvPr id="17" name="Text 13"/>
+          <p:cNvSpPr/>
+          <p:nvPr/>
+        </p:nvSpPr>
+        <p:spPr>
+          <a:xfrm>
+            <a:off x="914400" y="2880360"/>
+            <a:ext cx="4724248" cy="868680"/>
+          </a:xfrm>
+          <a:prstGeom prst="rect">
+            <a:avLst/>
+          </a:prstGeom>
+          <a:noFill/>
+          <a:ln/>
+        </p:spPr>
+        <p:txBody>
+          <a:bodyPr wrap="square" lIns="0" tIns="0" rIns="0" bIns="0" rtlCol="0" anchor="t"/>
+          <a:lstStyle/>
+          <a:p>
+            <a:pPr algn="r" indent="0" marL="0">
+              <a:lnSpc>
+                <a:spcPct val="120000"/>
+              </a:lnSpc>
+              <a:buNone/>
+            </a:pPr>
+            <a:r>
+              <a:rPr lang="en-US" sz="1250" b="1" dirty="0">
+                <a:solidFill>
+                  <a:srgbClr val="5B6E8C"/>
+                </a:solidFill>
+                <a:latin typeface="Arial" pitchFamily="34" charset="0"/>
+                <a:ea typeface="Arial" pitchFamily="34" charset="-122"/>
+                <a:cs typeface="Arial" pitchFamily="34" charset="-120"/>
+              </a:rPr>
+              <a:t>מטרה:  </a:t>
+            </a:r>
+            <a:pPr algn="r" indent="0" marL="0">
+              <a:lnSpc>
+                <a:spcPct val="120000"/>
+              </a:lnSpc>
+              <a:buNone/>
+            </a:pPr>
+            <a:r>
+              <a:rPr lang="en-US" sz="1250" dirty="0">
+                <a:solidFill>
+                  <a:srgbClr val="3E3426"/>
+                </a:solidFill>
+                <a:latin typeface="Arial" pitchFamily="34" charset="0"/>
+                <a:ea typeface="Arial" pitchFamily="34" charset="-122"/>
+                <a:cs typeface="Arial" pitchFamily="34" charset="-120"/>
+              </a:rPr>
+              <a:t>לפרק את היסודות ולהעלות את הדילמה המרכזית — למה הנושא הזה בכלל נפיץ?</a:t>
+            </a:r>
+            <a:endParaRPr lang="en-US" sz="1250" dirty="0"/>
+          </a:p>
+        </p:txBody>
+      </p:sp>
+      <p:sp>
+        <p:nvSpPr>
+          <p:cNvPr id="18" name="Shape 14"/>
+          <p:cNvSpPr/>
+          <p:nvPr/>
+        </p:nvSpPr>
+        <p:spPr>
+          <a:xfrm>
+            <a:off x="6278728" y="4114800"/>
+            <a:ext cx="5272888" cy="2011680"/>
           </a:xfrm>
           <a:prstGeom prst="roundRect">
             <a:avLst>
-              <a:gd name="adj" fmla="val 2940"/>
+              <a:gd name="adj" fmla="val 3636"/>
             </a:avLst>
           </a:prstGeom>
           <a:solidFill>
@@ -8622,14 +8954,14 @@
       </p:sp>
       <p:sp>
         <p:nvSpPr>
-          <p:cNvPr id="17" name="Shape 13"/>
-          <p:cNvSpPr/>
-          <p:nvPr/>
-        </p:nvSpPr>
-        <p:spPr>
-          <a:xfrm>
-            <a:off x="4303281" y="2491740"/>
-            <a:ext cx="777240" cy="777240"/>
+          <p:cNvPr id="19" name="Shape 15"/>
+          <p:cNvSpPr/>
+          <p:nvPr/>
+        </p:nvSpPr>
+        <p:spPr>
+          <a:xfrm>
+            <a:off x="10655503" y="4352544"/>
+            <a:ext cx="658368" cy="658368"/>
           </a:xfrm>
           <a:prstGeom prst="ellipse">
             <a:avLst/>
@@ -8642,7 +8974,7 @@
       </p:sp>
       <p:pic>
         <p:nvPicPr>
-          <p:cNvPr id="18" name="Image 2" descr="/tmp/claude-0/-home-user-Ein-Prat-work/bfe443db-e493-5438-add8-ac2e37bc83f4/scratchpad/pptx-build/icons/star.png">    </p:cNvPr>
+          <p:cNvPr id="20" name="Image 2" descr="/tmp/claude-0/-home-user-Ein-Prat-work/bfe443db-e493-5438-add8-ac2e37bc83f4/scratchpad/pptx-build/icons/star.png">    </p:cNvPr>
           <p:cNvPicPr>
             <a:picLocks noChangeAspect="1"/>
           </p:cNvPicPr>
@@ -8656,8 +8988,8 @@
         </p:blipFill>
         <p:spPr>
           <a:xfrm>
-            <a:off x="4489818" y="2678278"/>
-            <a:ext cx="404165" cy="404165"/>
+            <a:off x="10813512" y="4510552"/>
+            <a:ext cx="342351" cy="342351"/>
           </a:xfrm>
           <a:prstGeom prst="rect">
             <a:avLst/>
@@ -8666,13 +8998,13 @@
       </p:pic>
       <p:sp>
         <p:nvSpPr>
-          <p:cNvPr id="19" name="Text 14"/>
-          <p:cNvSpPr/>
-          <p:nvPr/>
-        </p:nvSpPr>
-        <p:spPr>
-          <a:xfrm>
-            <a:off x="5432908" y="2148840"/>
+          <p:cNvPr id="21" name="Text 16"/>
+          <p:cNvSpPr/>
+          <p:nvPr/>
+        </p:nvSpPr>
+        <p:spPr>
+          <a:xfrm>
+            <a:off x="6415888" y="4224528"/>
             <a:ext cx="365760" cy="365760"/>
           </a:xfrm>
           <a:prstGeom prst="rect">
@@ -8689,7 +9021,7 @@
               <a:buNone/>
             </a:pPr>
             <a:r>
-              <a:rPr lang="en-US" sz="1600" b="1" dirty="0">
+              <a:rPr lang="en-US" sz="1500" b="1" dirty="0">
                 <a:solidFill>
                   <a:srgbClr val="9C7B4F"/>
                 </a:solidFill>
@@ -8699,20 +9031,20 @@
               </a:rPr>
               <a:t>3</a:t>
             </a:r>
-            <a:endParaRPr lang="en-US" sz="1600" dirty="0"/>
+            <a:endParaRPr lang="en-US" sz="1500" dirty="0"/>
           </a:p>
         </p:txBody>
       </p:sp>
       <p:sp>
         <p:nvSpPr>
-          <p:cNvPr id="20" name="Text 15"/>
-          <p:cNvSpPr/>
-          <p:nvPr/>
-        </p:nvSpPr>
-        <p:spPr>
-          <a:xfrm>
-            <a:off x="3557702" y="3474720"/>
-            <a:ext cx="2268398" cy="640080"/>
+          <p:cNvPr id="22" name="Text 17"/>
+          <p:cNvSpPr/>
+          <p:nvPr/>
+        </p:nvSpPr>
+        <p:spPr>
+          <a:xfrm>
+            <a:off x="6553048" y="4315968"/>
+            <a:ext cx="4221328" cy="457200"/>
           </a:xfrm>
           <a:prstGeom prst="rect">
             <a:avLst/>
@@ -8724,7 +9056,7 @@
           <a:bodyPr wrap="square" lIns="0" tIns="0" rIns="0" bIns="0" rtlCol="0" anchor="ctr"/>
           <a:lstStyle/>
           <a:p>
-            <a:pPr algn="ctr" indent="0" marL="0">
+            <a:pPr algn="r" indent="0" marL="0">
               <a:buNone/>
             </a:pPr>
             <a:r>
@@ -8744,14 +9076,14 @@
       </p:sp>
       <p:sp>
         <p:nvSpPr>
-          <p:cNvPr id="21" name="Text 16"/>
-          <p:cNvSpPr/>
-          <p:nvPr/>
-        </p:nvSpPr>
-        <p:spPr>
-          <a:xfrm>
-            <a:off x="3585134" y="4114800"/>
-            <a:ext cx="2213534" cy="822960"/>
+          <p:cNvPr id="23" name="Text 18"/>
+          <p:cNvSpPr/>
+          <p:nvPr/>
+        </p:nvSpPr>
+        <p:spPr>
+          <a:xfrm>
+            <a:off x="6553048" y="4828032"/>
+            <a:ext cx="4724248" cy="320040"/>
           </a:xfrm>
           <a:prstGeom prst="rect">
             <a:avLst/>
@@ -8763,7 +9095,21 @@
           <a:bodyPr wrap="square" lIns="0" tIns="0" rIns="0" bIns="0" rtlCol="0" anchor="ctr"/>
           <a:lstStyle/>
           <a:p>
-            <a:pPr algn="ctr" indent="0" marL="0">
+            <a:pPr algn="r" indent="0" marL="0">
+              <a:buNone/>
+            </a:pPr>
+            <a:r>
+              <a:rPr lang="en-US" sz="1250" b="1" dirty="0">
+                <a:solidFill>
+                  <a:srgbClr val="9C7B4F"/>
+                </a:solidFill>
+                <a:latin typeface="Arial" pitchFamily="34" charset="0"/>
+                <a:ea typeface="Arial" pitchFamily="34" charset="-122"/>
+                <a:cs typeface="Arial" pitchFamily="34" charset="-120"/>
+              </a:rPr>
+              <a:t>אנרגיה:  </a:t>
+            </a:r>
+            <a:pPr algn="r" indent="0" marL="0">
               <a:buNone/>
             </a:pPr>
             <a:r>
@@ -8775,7 +9121,7 @@
                 <a:ea typeface="Arial" pitchFamily="34" charset="-122"/>
                 <a:cs typeface="Arial" pitchFamily="34" charset="-120"/>
               </a:rPr>
-              <a:t>אמנות · פסיכולוגיה · חברה</a:t>
+              <a:t>מפתיעה, מחברת בין תחומים</a:t>
             </a:r>
             <a:endParaRPr lang="en-US" sz="1250" dirty="0"/>
           </a:p>
@@ -8783,18 +9129,77 @@
       </p:sp>
       <p:sp>
         <p:nvSpPr>
-          <p:cNvPr id="22" name="Shape 17"/>
-          <p:cNvSpPr/>
-          <p:nvPr/>
-        </p:nvSpPr>
-        <p:spPr>
-          <a:xfrm>
-            <a:off x="640080" y="1965960"/>
-            <a:ext cx="2487854" cy="3291840"/>
+          <p:cNvPr id="24" name="Text 19"/>
+          <p:cNvSpPr/>
+          <p:nvPr/>
+        </p:nvSpPr>
+        <p:spPr>
+          <a:xfrm>
+            <a:off x="6553048" y="5166360"/>
+            <a:ext cx="4724248" cy="868680"/>
+          </a:xfrm>
+          <a:prstGeom prst="rect">
+            <a:avLst/>
+          </a:prstGeom>
+          <a:noFill/>
+          <a:ln/>
+        </p:spPr>
+        <p:txBody>
+          <a:bodyPr wrap="square" lIns="0" tIns="0" rIns="0" bIns="0" rtlCol="0" anchor="t"/>
+          <a:lstStyle/>
+          <a:p>
+            <a:pPr algn="r" indent="0" marL="0">
+              <a:lnSpc>
+                <a:spcPct val="120000"/>
+              </a:lnSpc>
+              <a:buNone/>
+            </a:pPr>
+            <a:r>
+              <a:rPr lang="en-US" sz="1250" b="1" dirty="0">
+                <a:solidFill>
+                  <a:srgbClr val="9C7B4F"/>
+                </a:solidFill>
+                <a:latin typeface="Arial" pitchFamily="34" charset="0"/>
+                <a:ea typeface="Arial" pitchFamily="34" charset="-122"/>
+                <a:cs typeface="Arial" pitchFamily="34" charset="-120"/>
+              </a:rPr>
+              <a:t>מטרה:  </a:t>
+            </a:r>
+            <a:pPr algn="r" indent="0" marL="0">
+              <a:lnSpc>
+                <a:spcPct val="120000"/>
+              </a:lnSpc>
+              <a:buNone/>
+            </a:pPr>
+            <a:r>
+              <a:rPr lang="en-US" sz="1250" dirty="0">
+                <a:solidFill>
+                  <a:srgbClr val="3E3426"/>
+                </a:solidFill>
+                <a:latin typeface="Arial" pitchFamily="34" charset="0"/>
+                <a:ea typeface="Arial" pitchFamily="34" charset="-122"/>
+                <a:cs typeface="Arial" pitchFamily="34" charset="-120"/>
+              </a:rPr>
+              <a:t>להסתכל על הנושא מזווית חדשה לגמרי — אמנות, פסיכולוגיה, סוציולוגיה, קולנוע.</a:t>
+            </a:r>
+            <a:endParaRPr lang="en-US" sz="1250" dirty="0"/>
+          </a:p>
+        </p:txBody>
+      </p:sp>
+      <p:sp>
+        <p:nvSpPr>
+          <p:cNvPr id="25" name="Shape 20"/>
+          <p:cNvSpPr/>
+          <p:nvPr/>
+        </p:nvSpPr>
+        <p:spPr>
+          <a:xfrm>
+            <a:off x="640080" y="4114800"/>
+            <a:ext cx="5272888" cy="2011680"/>
           </a:xfrm>
           <a:prstGeom prst="roundRect">
             <a:avLst>
-              <a:gd name="adj" fmla="val 2940"/>
+              <a:gd name="adj" fmla="val 3636"/>
             </a:avLst>
           </a:prstGeom>
           <a:solidFill>
@@ -8817,14 +9222,14 @@
       </p:sp>
       <p:sp>
         <p:nvSpPr>
-          <p:cNvPr id="23" name="Shape 18"/>
-          <p:cNvSpPr/>
-          <p:nvPr/>
-        </p:nvSpPr>
-        <p:spPr>
-          <a:xfrm>
-            <a:off x="1495387" y="2491740"/>
-            <a:ext cx="777240" cy="777240"/>
+          <p:cNvPr id="26" name="Shape 21"/>
+          <p:cNvSpPr/>
+          <p:nvPr/>
+        </p:nvSpPr>
+        <p:spPr>
+          <a:xfrm>
+            <a:off x="5016856" y="4352544"/>
+            <a:ext cx="658368" cy="658368"/>
           </a:xfrm>
           <a:prstGeom prst="ellipse">
             <a:avLst/>
@@ -8837,7 +9242,7 @@
       </p:sp>
       <p:pic>
         <p:nvPicPr>
-          <p:cNvPr id="24" name="Image 3" descr="/tmp/claude-0/-home-user-Ein-Prat-work/bfe443db-e493-5438-add8-ac2e37bc83f4/scratchpad/pptx-build/icons/heart.png">    </p:cNvPr>
+          <p:cNvPr id="27" name="Image 3" descr="/tmp/claude-0/-home-user-Ein-Prat-work/bfe443db-e493-5438-add8-ac2e37bc83f4/scratchpad/pptx-build/icons/heart.png">    </p:cNvPr>
           <p:cNvPicPr>
             <a:picLocks noChangeAspect="1"/>
           </p:cNvPicPr>
@@ -8851,8 +9256,8 @@
         </p:blipFill>
         <p:spPr>
           <a:xfrm>
-            <a:off x="1681925" y="2678278"/>
-            <a:ext cx="404165" cy="404165"/>
+            <a:off x="5174864" y="4510552"/>
+            <a:ext cx="342351" cy="342351"/>
           </a:xfrm>
           <a:prstGeom prst="rect">
             <a:avLst/>
@@ -8861,13 +9266,13 @@
       </p:pic>
       <p:sp>
         <p:nvSpPr>
-          <p:cNvPr id="25" name="Text 19"/>
-          <p:cNvSpPr/>
-          <p:nvPr/>
-        </p:nvSpPr>
-        <p:spPr>
-          <a:xfrm>
-            <a:off x="2625014" y="2148840"/>
+          <p:cNvPr id="28" name="Text 22"/>
+          <p:cNvSpPr/>
+          <p:nvPr/>
+        </p:nvSpPr>
+        <p:spPr>
+          <a:xfrm>
+            <a:off x="777240" y="4224528"/>
             <a:ext cx="365760" cy="365760"/>
           </a:xfrm>
           <a:prstGeom prst="rect">
@@ -8884,7 +9289,7 @@
               <a:buNone/>
             </a:pPr>
             <a:r>
-              <a:rPr lang="en-US" sz="1600" b="1" dirty="0">
+              <a:rPr lang="en-US" sz="1500" b="1" dirty="0">
                 <a:solidFill>
                   <a:srgbClr val="9C7B34"/>
                 </a:solidFill>
@@ -8894,20 +9299,20 @@
               </a:rPr>
               <a:t>4</a:t>
             </a:r>
-            <a:endParaRPr lang="en-US" sz="1600" dirty="0"/>
+            <a:endParaRPr lang="en-US" sz="1500" dirty="0"/>
           </a:p>
         </p:txBody>
       </p:sp>
       <p:sp>
         <p:nvSpPr>
-          <p:cNvPr id="26" name="Text 20"/>
-          <p:cNvSpPr/>
-          <p:nvPr/>
-        </p:nvSpPr>
-        <p:spPr>
-          <a:xfrm>
-            <a:off x="749808" y="3474720"/>
-            <a:ext cx="2268398" cy="640080"/>
+          <p:cNvPr id="29" name="Text 23"/>
+          <p:cNvSpPr/>
+          <p:nvPr/>
+        </p:nvSpPr>
+        <p:spPr>
+          <a:xfrm>
+            <a:off x="914400" y="4315968"/>
+            <a:ext cx="4221328" cy="457200"/>
           </a:xfrm>
           <a:prstGeom prst="rect">
             <a:avLst/>
@@ -8919,7 +9324,7 @@
           <a:bodyPr wrap="square" lIns="0" tIns="0" rIns="0" bIns="0" rtlCol="0" anchor="ctr"/>
           <a:lstStyle/>
           <a:p>
-            <a:pPr algn="ctr" indent="0" marL="0">
+            <a:pPr algn="r" indent="0" marL="0">
               <a:buNone/>
             </a:pPr>
             <a:r>
@@ -8939,14 +9344,14 @@
       </p:sp>
       <p:sp>
         <p:nvSpPr>
-          <p:cNvPr id="27" name="Text 21"/>
-          <p:cNvSpPr/>
-          <p:nvPr/>
-        </p:nvSpPr>
-        <p:spPr>
-          <a:xfrm>
-            <a:off x="777240" y="4114800"/>
-            <a:ext cx="2213534" cy="822960"/>
+          <p:cNvPr id="30" name="Text 24"/>
+          <p:cNvSpPr/>
+          <p:nvPr/>
+        </p:nvSpPr>
+        <p:spPr>
+          <a:xfrm>
+            <a:off x="914400" y="4828032"/>
+            <a:ext cx="4724248" cy="320040"/>
           </a:xfrm>
           <a:prstGeom prst="rect">
             <a:avLst/>
@@ -8958,7 +9363,21 @@
           <a:bodyPr wrap="square" lIns="0" tIns="0" rIns="0" bIns="0" rtlCol="0" anchor="ctr"/>
           <a:lstStyle/>
           <a:p>
-            <a:pPr algn="ctr" indent="0" marL="0">
+            <a:pPr algn="r" indent="0" marL="0">
+              <a:buNone/>
+            </a:pPr>
+            <a:r>
+              <a:rPr lang="en-US" sz="1250" b="1" dirty="0">
+                <a:solidFill>
+                  <a:srgbClr val="9C7B34"/>
+                </a:solidFill>
+                <a:latin typeface="Arial" pitchFamily="34" charset="0"/>
+                <a:ea typeface="Arial" pitchFamily="34" charset="-122"/>
+                <a:cs typeface="Arial" pitchFamily="34" charset="-120"/>
+              </a:rPr>
+              <a:t>אנרגיה:  </a:t>
+            </a:r>
+            <a:pPr algn="r" indent="0" marL="0">
               <a:buNone/>
             </a:pPr>
             <a:r>
@@ -8970,7 +9389,7 @@
                 <a:ea typeface="Arial" pitchFamily="34" charset="-122"/>
                 <a:cs typeface="Arial" pitchFamily="34" charset="-120"/>
               </a:rPr>
-              <a:t>רגש, אינטימיות, "חבורה"</a:t>
+              <a:t>אינטימית, קיומית, פתוחה</a:t>
             </a:r>
             <a:endParaRPr lang="en-US" sz="1250" dirty="0"/>
           </a:p>
@@ -8978,41 +9397,14 @@
       </p:sp>
       <p:sp>
         <p:nvSpPr>
-          <p:cNvPr id="28" name="Shape 22"/>
-          <p:cNvSpPr/>
-          <p:nvPr/>
-        </p:nvSpPr>
-        <p:spPr>
-          <a:xfrm>
-            <a:off x="640080" y="5532120"/>
-            <a:ext cx="10911535" cy="594360"/>
-          </a:xfrm>
-          <a:prstGeom prst="roundRect">
-            <a:avLst>
-              <a:gd name="adj" fmla="val 12308"/>
-            </a:avLst>
-          </a:prstGeom>
-          <a:solidFill>
-            <a:srgbClr val="F5F1E6"/>
-          </a:solidFill>
-          <a:ln w="12700">
-            <a:solidFill>
-              <a:srgbClr val="E4DDCB"/>
-            </a:solidFill>
-            <a:prstDash val="solid"/>
-          </a:ln>
-        </p:spPr>
-      </p:sp>
-      <p:sp>
-        <p:nvSpPr>
-          <p:cNvPr id="29" name="Text 23"/>
-          <p:cNvSpPr/>
-          <p:nvPr/>
-        </p:nvSpPr>
-        <p:spPr>
-          <a:xfrm>
-            <a:off x="822960" y="5532120"/>
-            <a:ext cx="10545775" cy="594360"/>
+          <p:cNvPr id="31" name="Text 25"/>
+          <p:cNvSpPr/>
+          <p:nvPr/>
+        </p:nvSpPr>
+        <p:spPr>
+          <a:xfrm>
+            <a:off x="914400" y="5166360"/>
+            <a:ext cx="4724248" cy="868680"/>
           </a:xfrm>
           <a:prstGeom prst="rect">
             <a:avLst/>
@@ -9021,30 +9413,50 @@
           <a:ln/>
         </p:spPr>
         <p:txBody>
-          <a:bodyPr wrap="square" lIns="0" tIns="0" rIns="0" bIns="0" rtlCol="0" anchor="ctr"/>
+          <a:bodyPr wrap="square" lIns="0" tIns="0" rIns="0" bIns="0" rtlCol="0" anchor="t"/>
           <a:lstStyle/>
           <a:p>
-            <a:pPr algn="ctr" indent="0" marL="0">
+            <a:pPr algn="r" indent="0" marL="0">
+              <a:lnSpc>
+                <a:spcPct val="120000"/>
+              </a:lnSpc>
               <a:buNone/>
             </a:pPr>
             <a:r>
-              <a:rPr lang="en-US" sz="1350" i="1" dirty="0">
+              <a:rPr lang="en-US" sz="1250" b="1" dirty="0">
                 <a:solidFill>
-                  <a:srgbClr val="6E6250"/>
+                  <a:srgbClr val="9C7B34"/>
                 </a:solidFill>
                 <a:latin typeface="Arial" pitchFamily="34" charset="0"/>
                 <a:ea typeface="Arial" pitchFamily="34" charset="-122"/>
                 <a:cs typeface="Arial" pitchFamily="34" charset="-120"/>
               </a:rPr>
-              <a:t>זה כלי השראה למבנה הרעיוני של הלילה — לא נוסחה שחייבים לעקוב אחריה. הסלייד הבא מראה איך זה נראה בפועל.</a:t>
+              <a:t>מטרה:  </a:t>
             </a:r>
-            <a:endParaRPr lang="en-US" sz="1350" dirty="0"/>
+            <a:pPr algn="r" indent="0" marL="0">
+              <a:lnSpc>
+                <a:spcPct val="120000"/>
+              </a:lnSpc>
+              <a:buNone/>
+            </a:pPr>
+            <a:r>
+              <a:rPr lang="en-US" sz="1250" dirty="0">
+                <a:solidFill>
+                  <a:srgbClr val="3E3426"/>
+                </a:solidFill>
+                <a:latin typeface="Arial" pitchFamily="34" charset="0"/>
+                <a:ea typeface="Arial" pitchFamily="34" charset="-122"/>
+                <a:cs typeface="Arial" pitchFamily="34" charset="-120"/>
+              </a:rPr>
+              <a:t>לגעת ברלוונטיות האישית — "איפה זה פוגש אותי?" נחיתה רכה לתוך הלילה.</a:t>
+            </a:r>
+            <a:endParaRPr lang="en-US" sz="1250" dirty="0"/>
           </a:p>
         </p:txBody>
       </p:sp>
       <p:sp>
         <p:nvSpPr>
-          <p:cNvPr id="30" name="Text 24"/>
+          <p:cNvPr id="32" name="Text 26"/>
           <p:cNvSpPr/>
           <p:nvPr/>
         </p:nvSpPr>
@@ -9083,7 +9495,7 @@
       </p:sp>
       <p:sp>
         <p:nvSpPr>
-          <p:cNvPr id="31" name="Text 25"/>
+          <p:cNvPr id="33" name="Text 27"/>
           <p:cNvSpPr/>
           <p:nvPr/>
         </p:nvSpPr>
@@ -9185,7 +9597,7 @@
                 <a:ea typeface="Arial" pitchFamily="34" charset="-122"/>
                 <a:cs typeface="Arial" pitchFamily="34" charset="-120"/>
               </a:rPr>
-              <a:t>מהארכיון של שנה שעברה</a:t>
+              <a:t>האפשרויות שלכם</a:t>
             </a:r>
             <a:endParaRPr lang="en-US" sz="1300" dirty="0"/>
           </a:p>
@@ -9224,7 +9636,7 @@
                 <a:ea typeface="Cambria" pitchFamily="34" charset="-122"/>
                 <a:cs typeface="Cambria" pitchFamily="34" charset="-120"/>
               </a:rPr>
-              <a:t>משמר לא חייב להיראות ככה</a:t>
+              <a:t>בוחרים רכיבים — לא ממלאים תבנית</a:t>
             </a:r>
             <a:endParaRPr lang="en-US" sz="3200" dirty="0"/>
           </a:p>
@@ -9238,20 +9650,20 @@
         </p:nvSpPr>
         <p:spPr>
           <a:xfrm>
-            <a:off x="8158277" y="1920240"/>
-            <a:ext cx="3393338" cy="3566160"/>
+            <a:off x="6278728" y="1828800"/>
+            <a:ext cx="5272888" cy="2011680"/>
           </a:xfrm>
           <a:prstGeom prst="roundRect">
             <a:avLst>
-              <a:gd name="adj" fmla="val 2156"/>
+              <a:gd name="adj" fmla="val 3636"/>
             </a:avLst>
           </a:prstGeom>
           <a:solidFill>
-            <a:srgbClr val="FFFFFF"/>
+            <a:srgbClr val="DEE9EF"/>
           </a:solidFill>
           <a:ln w="12700">
             <a:solidFill>
-              <a:srgbClr val="E4DDCB"/>
+              <a:srgbClr val="3F6480"/>
             </a:solidFill>
             <a:prstDash val="solid"/>
           </a:ln>
@@ -9272,21 +9684,21 @@
         </p:nvSpPr>
         <p:spPr>
           <a:xfrm>
-            <a:off x="9466326" y="2308860"/>
-            <a:ext cx="777240" cy="777240"/>
+            <a:off x="10737799" y="1975104"/>
+            <a:ext cx="621792" cy="621792"/>
           </a:xfrm>
           <a:prstGeom prst="ellipse">
             <a:avLst/>
           </a:prstGeom>
           <a:solidFill>
-            <a:srgbClr val="5E7B47"/>
+            <a:srgbClr val="3F6480"/>
           </a:solidFill>
           <a:ln/>
         </p:spPr>
       </p:sp>
       <p:pic>
         <p:nvPicPr>
-          <p:cNvPr id="6" name="Image 0" descr="/tmp/claude-0/-home-user-Ein-Prat-work/bfe443db-e493-5438-add8-ac2e37bc83f4/scratchpad/pptx-build/icons/edit.png">    </p:cNvPr>
+          <p:cNvPr id="6" name="Image 0" descr="/tmp/claude-0/-home-user-Ein-Prat-work/bfe443db-e493-5438-add8-ac2e37bc83f4/scratchpad/pptx-build/icons/star.png">    </p:cNvPr>
           <p:cNvPicPr>
             <a:picLocks noChangeAspect="1"/>
           </p:cNvPicPr>
@@ -9300,8 +9712,8 @@
         </p:blipFill>
         <p:spPr>
           <a:xfrm>
-            <a:off x="9652864" y="2495398"/>
-            <a:ext cx="404165" cy="404165"/>
+            <a:off x="10887029" y="2124334"/>
+            <a:ext cx="323332" cy="323332"/>
           </a:xfrm>
           <a:prstGeom prst="rect">
             <a:avLst/>
@@ -9316,8 +9728,8 @@
         </p:nvSpPr>
         <p:spPr>
           <a:xfrm>
-            <a:off x="8341157" y="3291840"/>
-            <a:ext cx="3027578" cy="548640"/>
+            <a:off x="6507328" y="2011680"/>
+            <a:ext cx="4267048" cy="502920"/>
           </a:xfrm>
           <a:prstGeom prst="rect">
             <a:avLst/>
@@ -9329,11 +9741,11 @@
           <a:bodyPr wrap="square" lIns="0" tIns="0" rIns="0" bIns="0" rtlCol="0" anchor="ctr"/>
           <a:lstStyle/>
           <a:p>
-            <a:pPr algn="ctr" indent="0" marL="0">
+            <a:pPr algn="r" indent="0" marL="0">
               <a:buNone/>
             </a:pPr>
             <a:r>
-              <a:rPr lang="en-US" sz="1600" b="1" dirty="0">
+              <a:rPr lang="en-US" sz="1650" b="1" dirty="0">
                 <a:solidFill>
                   <a:srgbClr val="3E3426"/>
                 </a:solidFill>
@@ -9341,22 +9753,42 @@
                 <a:ea typeface="Cambria" pitchFamily="34" charset="-122"/>
                 <a:cs typeface="Cambria" pitchFamily="34" charset="-120"/>
               </a:rPr>
-              <a:t>משמר אלול</a:t>
+              <a:t>פתיחה</a:t>
             </a:r>
-            <a:endParaRPr lang="en-US" sz="1600" dirty="0"/>
+            <a:endParaRPr lang="en-US" sz="1650" dirty="0"/>
           </a:p>
         </p:txBody>
       </p:sp>
       <p:sp>
         <p:nvSpPr>
-          <p:cNvPr id="8" name="Text 5"/>
-          <p:cNvSpPr/>
-          <p:nvPr/>
-        </p:nvSpPr>
-        <p:spPr>
-          <a:xfrm>
-            <a:off x="8386877" y="3886200"/>
-            <a:ext cx="2936138" cy="1463040"/>
+          <p:cNvPr id="8" name="Shape 5"/>
+          <p:cNvSpPr/>
+          <p:nvPr/>
+        </p:nvSpPr>
+        <p:spPr>
+          <a:xfrm>
+            <a:off x="11167567" y="2679192"/>
+            <a:ext cx="73152" cy="73152"/>
+          </a:xfrm>
+          <a:prstGeom prst="ellipse">
+            <a:avLst/>
+          </a:prstGeom>
+          <a:solidFill>
+            <a:srgbClr val="3F6480"/>
+          </a:solidFill>
+          <a:ln/>
+        </p:spPr>
+      </p:sp>
+      <p:sp>
+        <p:nvSpPr>
+          <p:cNvPr id="9" name="Text 6"/>
+          <p:cNvSpPr/>
+          <p:nvPr/>
+        </p:nvSpPr>
+        <p:spPr>
+          <a:xfrm>
+            <a:off x="6507328" y="2560320"/>
+            <a:ext cx="4495648" cy="292608"/>
           </a:xfrm>
           <a:prstGeom prst="rect">
             <a:avLst/>
@@ -9365,22 +9797,22 @@
           <a:ln/>
         </p:spPr>
         <p:txBody>
-          <a:bodyPr wrap="square" lIns="0" tIns="0" rIns="0" bIns="0" rtlCol="0" anchor="t"/>
+          <a:bodyPr wrap="square" lIns="0" tIns="0" rIns="0" bIns="0" rtlCol="0" anchor="ctr"/>
           <a:lstStyle/>
           <a:p>
-            <a:pPr algn="ctr" indent="0" marL="0">
+            <a:pPr algn="r" indent="0" marL="0">
               <a:buNone/>
             </a:pPr>
             <a:r>
               <a:rPr lang="en-US" sz="1250" dirty="0">
                 <a:solidFill>
-                  <a:srgbClr val="6E6250"/>
+                  <a:srgbClr val="3E3426"/>
                 </a:solidFill>
                 <a:latin typeface="Arial" pitchFamily="34" charset="0"/>
                 <a:ea typeface="Arial" pitchFamily="34" charset="-122"/>
                 <a:cs typeface="Arial" pitchFamily="34" charset="-120"/>
               </a:rPr>
-              <a:t>3 שיעורים ברצף (20:30–2:00) ואז חבורות בטקסט עד 3:30</a:t>
+              <a:t>שיעור ראשון רגיל</a:t>
             </a:r>
             <a:endParaRPr lang="en-US" sz="1250" dirty="0"/>
           </a:p>
@@ -9388,26 +9820,203 @@
       </p:sp>
       <p:sp>
         <p:nvSpPr>
-          <p:cNvPr id="9" name="Shape 6"/>
-          <p:cNvSpPr/>
-          <p:nvPr/>
-        </p:nvSpPr>
-        <p:spPr>
-          <a:xfrm>
-            <a:off x="4399178" y="1920240"/>
-            <a:ext cx="3393338" cy="3566160"/>
+          <p:cNvPr id="10" name="Shape 7"/>
+          <p:cNvSpPr/>
+          <p:nvPr/>
+        </p:nvSpPr>
+        <p:spPr>
+          <a:xfrm>
+            <a:off x="11167567" y="2971800"/>
+            <a:ext cx="73152" cy="73152"/>
+          </a:xfrm>
+          <a:prstGeom prst="ellipse">
+            <a:avLst/>
+          </a:prstGeom>
+          <a:solidFill>
+            <a:srgbClr val="3F6480"/>
+          </a:solidFill>
+          <a:ln/>
+        </p:spPr>
+      </p:sp>
+      <p:sp>
+        <p:nvSpPr>
+          <p:cNvPr id="11" name="Text 8"/>
+          <p:cNvSpPr/>
+          <p:nvPr/>
+        </p:nvSpPr>
+        <p:spPr>
+          <a:xfrm>
+            <a:off x="6507328" y="2852928"/>
+            <a:ext cx="4495648" cy="292608"/>
+          </a:xfrm>
+          <a:prstGeom prst="rect">
+            <a:avLst/>
+          </a:prstGeom>
+          <a:noFill/>
+          <a:ln/>
+        </p:spPr>
+        <p:txBody>
+          <a:bodyPr wrap="square" lIns="0" tIns="0" rIns="0" bIns="0" rtlCol="0" anchor="ctr"/>
+          <a:lstStyle/>
+          <a:p>
+            <a:pPr algn="r" indent="0" marL="0">
+              <a:buNone/>
+            </a:pPr>
+            <a:r>
+              <a:rPr lang="en-US" sz="1250" dirty="0">
+                <a:solidFill>
+                  <a:srgbClr val="3E3426"/>
+                </a:solidFill>
+                <a:latin typeface="Arial" pitchFamily="34" charset="0"/>
+                <a:ea typeface="Arial" pitchFamily="34" charset="-122"/>
+                <a:cs typeface="Arial" pitchFamily="34" charset="-120"/>
+              </a:rPr>
+              <a:t>טקס ממלכתי (כמו ליום הזכרון)</a:t>
+            </a:r>
+            <a:endParaRPr lang="en-US" sz="1250" dirty="0"/>
+          </a:p>
+        </p:txBody>
+      </p:sp>
+      <p:sp>
+        <p:nvSpPr>
+          <p:cNvPr id="12" name="Shape 9"/>
+          <p:cNvSpPr/>
+          <p:nvPr/>
+        </p:nvSpPr>
+        <p:spPr>
+          <a:xfrm>
+            <a:off x="11167567" y="3264408"/>
+            <a:ext cx="73152" cy="73152"/>
+          </a:xfrm>
+          <a:prstGeom prst="ellipse">
+            <a:avLst/>
+          </a:prstGeom>
+          <a:solidFill>
+            <a:srgbClr val="3F6480"/>
+          </a:solidFill>
+          <a:ln/>
+        </p:spPr>
+      </p:sp>
+      <p:sp>
+        <p:nvSpPr>
+          <p:cNvPr id="13" name="Text 10"/>
+          <p:cNvSpPr/>
+          <p:nvPr/>
+        </p:nvSpPr>
+        <p:spPr>
+          <a:xfrm>
+            <a:off x="6507328" y="3145536"/>
+            <a:ext cx="4495648" cy="292608"/>
+          </a:xfrm>
+          <a:prstGeom prst="rect">
+            <a:avLst/>
+          </a:prstGeom>
+          <a:noFill/>
+          <a:ln/>
+        </p:spPr>
+        <p:txBody>
+          <a:bodyPr wrap="square" lIns="0" tIns="0" rIns="0" bIns="0" rtlCol="0" anchor="ctr"/>
+          <a:lstStyle/>
+          <a:p>
+            <a:pPr algn="r" indent="0" marL="0">
+              <a:buNone/>
+            </a:pPr>
+            <a:r>
+              <a:rPr lang="en-US" sz="1250" dirty="0">
+                <a:solidFill>
+                  <a:srgbClr val="3E3426"/>
+                </a:solidFill>
+                <a:latin typeface="Arial" pitchFamily="34" charset="0"/>
+                <a:ea typeface="Arial" pitchFamily="34" charset="-122"/>
+                <a:cs typeface="Arial" pitchFamily="34" charset="-120"/>
+              </a:rPr>
+              <a:t>הרצאת אורח</a:t>
+            </a:r>
+            <a:endParaRPr lang="en-US" sz="1250" dirty="0"/>
+          </a:p>
+        </p:txBody>
+      </p:sp>
+      <p:sp>
+        <p:nvSpPr>
+          <p:cNvPr id="14" name="Shape 11"/>
+          <p:cNvSpPr/>
+          <p:nvPr/>
+        </p:nvSpPr>
+        <p:spPr>
+          <a:xfrm>
+            <a:off x="11167567" y="3557016"/>
+            <a:ext cx="73152" cy="73152"/>
+          </a:xfrm>
+          <a:prstGeom prst="ellipse">
+            <a:avLst/>
+          </a:prstGeom>
+          <a:solidFill>
+            <a:srgbClr val="3F6480"/>
+          </a:solidFill>
+          <a:ln/>
+        </p:spPr>
+      </p:sp>
+      <p:sp>
+        <p:nvSpPr>
+          <p:cNvPr id="15" name="Text 12"/>
+          <p:cNvSpPr/>
+          <p:nvPr/>
+        </p:nvSpPr>
+        <p:spPr>
+          <a:xfrm>
+            <a:off x="6507328" y="3438144"/>
+            <a:ext cx="4495648" cy="292608"/>
+          </a:xfrm>
+          <a:prstGeom prst="rect">
+            <a:avLst/>
+          </a:prstGeom>
+          <a:noFill/>
+          <a:ln/>
+        </p:spPr>
+        <p:txBody>
+          <a:bodyPr wrap="square" lIns="0" tIns="0" rIns="0" bIns="0" rtlCol="0" anchor="ctr"/>
+          <a:lstStyle/>
+          <a:p>
+            <a:pPr algn="r" indent="0" marL="0">
+              <a:buNone/>
+            </a:pPr>
+            <a:r>
+              <a:rPr lang="en-US" sz="1250" dirty="0">
+                <a:solidFill>
+                  <a:srgbClr val="3E3426"/>
+                </a:solidFill>
+                <a:latin typeface="Arial" pitchFamily="34" charset="0"/>
+                <a:ea typeface="Arial" pitchFamily="34" charset="-122"/>
+                <a:cs typeface="Arial" pitchFamily="34" charset="-120"/>
+              </a:rPr>
+              <a:t>משבצת פתיחה קצרה שמציגה את הנושא</a:t>
+            </a:r>
+            <a:endParaRPr lang="en-US" sz="1250" dirty="0"/>
+          </a:p>
+        </p:txBody>
+      </p:sp>
+      <p:sp>
+        <p:nvSpPr>
+          <p:cNvPr id="16" name="Shape 13"/>
+          <p:cNvSpPr/>
+          <p:nvPr/>
+        </p:nvSpPr>
+        <p:spPr>
+          <a:xfrm>
+            <a:off x="640080" y="1828800"/>
+            <a:ext cx="5272888" cy="2011680"/>
           </a:xfrm>
           <a:prstGeom prst="roundRect">
             <a:avLst>
-              <a:gd name="adj" fmla="val 2156"/>
+              <a:gd name="adj" fmla="val 3636"/>
             </a:avLst>
           </a:prstGeom>
           <a:solidFill>
-            <a:srgbClr val="FFFFFF"/>
+            <a:srgbClr val="E7EEDF"/>
           </a:solidFill>
           <a:ln w="12700">
             <a:solidFill>
-              <a:srgbClr val="E4DDCB"/>
+              <a:srgbClr val="5E7B47"/>
             </a:solidFill>
             <a:prstDash val="solid"/>
           </a:ln>
@@ -9422,14 +10031,14 @@
       </p:sp>
       <p:sp>
         <p:nvSpPr>
-          <p:cNvPr id="10" name="Shape 7"/>
-          <p:cNvSpPr/>
-          <p:nvPr/>
-        </p:nvSpPr>
-        <p:spPr>
-          <a:xfrm>
-            <a:off x="5707228" y="2308860"/>
-            <a:ext cx="777240" cy="777240"/>
+          <p:cNvPr id="17" name="Shape 14"/>
+          <p:cNvSpPr/>
+          <p:nvPr/>
+        </p:nvSpPr>
+        <p:spPr>
+          <a:xfrm>
+            <a:off x="5099152" y="1975104"/>
+            <a:ext cx="621792" cy="621792"/>
           </a:xfrm>
           <a:prstGeom prst="ellipse">
             <a:avLst/>
@@ -9442,7 +10051,7 @@
       </p:sp>
       <p:pic>
         <p:nvPicPr>
-          <p:cNvPr id="11" name="Image 1" descr="/tmp/claude-0/-home-user-Ein-Prat-work/bfe443db-e493-5438-add8-ac2e37bc83f4/scratchpad/pptx-build/icons/award.png">    </p:cNvPr>
+          <p:cNvPr id="18" name="Image 1" descr="/tmp/claude-0/-home-user-Ein-Prat-work/bfe443db-e493-5438-add8-ac2e37bc83f4/scratchpad/pptx-build/icons/globe.png">    </p:cNvPr>
           <p:cNvPicPr>
             <a:picLocks noChangeAspect="1"/>
           </p:cNvPicPr>
@@ -9456,8 +10065,8 @@
         </p:blipFill>
         <p:spPr>
           <a:xfrm>
-            <a:off x="5893765" y="2495398"/>
-            <a:ext cx="404165" cy="404165"/>
+            <a:off x="5248382" y="2124334"/>
+            <a:ext cx="323332" cy="323332"/>
           </a:xfrm>
           <a:prstGeom prst="rect">
             <a:avLst/>
@@ -9466,14 +10075,14 @@
       </p:pic>
       <p:sp>
         <p:nvSpPr>
-          <p:cNvPr id="12" name="Text 8"/>
-          <p:cNvSpPr/>
-          <p:nvPr/>
-        </p:nvSpPr>
-        <p:spPr>
-          <a:xfrm>
-            <a:off x="4582058" y="3291840"/>
-            <a:ext cx="3027578" cy="548640"/>
+          <p:cNvPr id="19" name="Text 15"/>
+          <p:cNvSpPr/>
+          <p:nvPr/>
+        </p:nvSpPr>
+        <p:spPr>
+          <a:xfrm>
+            <a:off x="868680" y="2011680"/>
+            <a:ext cx="4267048" cy="502920"/>
           </a:xfrm>
           <a:prstGeom prst="rect">
             <a:avLst/>
@@ -9485,11 +10094,11 @@
           <a:bodyPr wrap="square" lIns="0" tIns="0" rIns="0" bIns="0" rtlCol="0" anchor="ctr"/>
           <a:lstStyle/>
           <a:p>
-            <a:pPr algn="ctr" indent="0" marL="0">
+            <a:pPr algn="r" indent="0" marL="0">
               <a:buNone/>
             </a:pPr>
             <a:r>
-              <a:rPr lang="en-US" sz="1600" b="1" dirty="0">
+              <a:rPr lang="en-US" sz="1650" b="1" dirty="0">
                 <a:solidFill>
                   <a:srgbClr val="3E3426"/>
                 </a:solidFill>
@@ -9497,22 +10106,42 @@
                 <a:ea typeface="Cambria" pitchFamily="34" charset="-122"/>
                 <a:cs typeface="Cambria" pitchFamily="34" charset="-120"/>
               </a:rPr>
-              <a:t>משמר יום הזכרון (7/10)</a:t>
+              <a:t>זווית / אמצע</a:t>
             </a:r>
-            <a:endParaRPr lang="en-US" sz="1600" dirty="0"/>
+            <a:endParaRPr lang="en-US" sz="1650" dirty="0"/>
           </a:p>
         </p:txBody>
       </p:sp>
       <p:sp>
         <p:nvSpPr>
-          <p:cNvPr id="13" name="Text 9"/>
-          <p:cNvSpPr/>
-          <p:nvPr/>
-        </p:nvSpPr>
-        <p:spPr>
-          <a:xfrm>
-            <a:off x="4627778" y="3886200"/>
-            <a:ext cx="2936138" cy="1463040"/>
+          <p:cNvPr id="20" name="Shape 16"/>
+          <p:cNvSpPr/>
+          <p:nvPr/>
+        </p:nvSpPr>
+        <p:spPr>
+          <a:xfrm>
+            <a:off x="5528920" y="2679192"/>
+            <a:ext cx="73152" cy="73152"/>
+          </a:xfrm>
+          <a:prstGeom prst="ellipse">
+            <a:avLst/>
+          </a:prstGeom>
+          <a:solidFill>
+            <a:srgbClr val="5E7B47"/>
+          </a:solidFill>
+          <a:ln/>
+        </p:spPr>
+      </p:sp>
+      <p:sp>
+        <p:nvSpPr>
+          <p:cNvPr id="21" name="Text 17"/>
+          <p:cNvSpPr/>
+          <p:nvPr/>
+        </p:nvSpPr>
+        <p:spPr>
+          <a:xfrm>
+            <a:off x="868680" y="2560320"/>
+            <a:ext cx="4495648" cy="292608"/>
           </a:xfrm>
           <a:prstGeom prst="rect">
             <a:avLst/>
@@ -9521,22 +10150,22 @@
           <a:ln/>
         </p:spPr>
         <p:txBody>
-          <a:bodyPr wrap="square" lIns="0" tIns="0" rIns="0" bIns="0" rtlCol="0" anchor="t"/>
+          <a:bodyPr wrap="square" lIns="0" tIns="0" rIns="0" bIns="0" rtlCol="0" anchor="ctr"/>
           <a:lstStyle/>
           <a:p>
-            <a:pPr algn="ctr" indent="0" marL="0">
+            <a:pPr algn="r" indent="0" marL="0">
               <a:buNone/>
             </a:pPr>
             <a:r>
               <a:rPr lang="en-US" sz="1250" dirty="0">
                 <a:solidFill>
-                  <a:srgbClr val="6E6250"/>
+                  <a:srgbClr val="3E3426"/>
                 </a:solidFill>
                 <a:latin typeface="Arial" pitchFamily="34" charset="0"/>
                 <a:ea typeface="Arial" pitchFamily="34" charset="-122"/>
                 <a:cs typeface="Arial" pitchFamily="34" charset="-120"/>
               </a:rPr>
-              <a:t>טקס ממלכתי ← מעגל שירים וסיפורי גבורה ← סיפור מורשת קרב ← חבורות רשות</a:t>
+              <a:t>מרצה חיצוני</a:t>
             </a:r>
             <a:endParaRPr lang="en-US" sz="1250" dirty="0"/>
           </a:p>
@@ -9544,26 +10173,203 @@
       </p:sp>
       <p:sp>
         <p:nvSpPr>
-          <p:cNvPr id="14" name="Shape 10"/>
-          <p:cNvSpPr/>
-          <p:nvPr/>
-        </p:nvSpPr>
-        <p:spPr>
-          <a:xfrm>
-            <a:off x="640080" y="1920240"/>
-            <a:ext cx="3393338" cy="3566160"/>
+          <p:cNvPr id="22" name="Shape 18"/>
+          <p:cNvSpPr/>
+          <p:nvPr/>
+        </p:nvSpPr>
+        <p:spPr>
+          <a:xfrm>
+            <a:off x="5528920" y="2971800"/>
+            <a:ext cx="73152" cy="73152"/>
+          </a:xfrm>
+          <a:prstGeom prst="ellipse">
+            <a:avLst/>
+          </a:prstGeom>
+          <a:solidFill>
+            <a:srgbClr val="5E7B47"/>
+          </a:solidFill>
+          <a:ln/>
+        </p:spPr>
+      </p:sp>
+      <p:sp>
+        <p:nvSpPr>
+          <p:cNvPr id="23" name="Text 19"/>
+          <p:cNvSpPr/>
+          <p:nvPr/>
+        </p:nvSpPr>
+        <p:spPr>
+          <a:xfrm>
+            <a:off x="868680" y="2852928"/>
+            <a:ext cx="4495648" cy="292608"/>
+          </a:xfrm>
+          <a:prstGeom prst="rect">
+            <a:avLst/>
+          </a:prstGeom>
+          <a:noFill/>
+          <a:ln/>
+        </p:spPr>
+        <p:txBody>
+          <a:bodyPr wrap="square" lIns="0" tIns="0" rIns="0" bIns="0" rtlCol="0" anchor="ctr"/>
+          <a:lstStyle/>
+          <a:p>
+            <a:pPr algn="r" indent="0" marL="0">
+              <a:buNone/>
+            </a:pPr>
+            <a:r>
+              <a:rPr lang="en-US" sz="1250" dirty="0">
+                <a:solidFill>
+                  <a:srgbClr val="3E3426"/>
+                </a:solidFill>
+                <a:latin typeface="Arial" pitchFamily="34" charset="0"/>
+                <a:ea typeface="Arial" pitchFamily="34" charset="-122"/>
+                <a:cs typeface="Arial" pitchFamily="34" charset="-120"/>
+              </a:rPr>
+              <a:t>ניתוח יצירה או סרט</a:t>
+            </a:r>
+            <a:endParaRPr lang="en-US" sz="1250" dirty="0"/>
+          </a:p>
+        </p:txBody>
+      </p:sp>
+      <p:sp>
+        <p:nvSpPr>
+          <p:cNvPr id="24" name="Shape 20"/>
+          <p:cNvSpPr/>
+          <p:nvPr/>
+        </p:nvSpPr>
+        <p:spPr>
+          <a:xfrm>
+            <a:off x="5528920" y="3264408"/>
+            <a:ext cx="73152" cy="73152"/>
+          </a:xfrm>
+          <a:prstGeom prst="ellipse">
+            <a:avLst/>
+          </a:prstGeom>
+          <a:solidFill>
+            <a:srgbClr val="5E7B47"/>
+          </a:solidFill>
+          <a:ln/>
+        </p:spPr>
+      </p:sp>
+      <p:sp>
+        <p:nvSpPr>
+          <p:cNvPr id="25" name="Text 21"/>
+          <p:cNvSpPr/>
+          <p:nvPr/>
+        </p:nvSpPr>
+        <p:spPr>
+          <a:xfrm>
+            <a:off x="868680" y="3145536"/>
+            <a:ext cx="4495648" cy="292608"/>
+          </a:xfrm>
+          <a:prstGeom prst="rect">
+            <a:avLst/>
+          </a:prstGeom>
+          <a:noFill/>
+          <a:ln/>
+        </p:spPr>
+        <p:txBody>
+          <a:bodyPr wrap="square" lIns="0" tIns="0" rIns="0" bIns="0" rtlCol="0" anchor="ctr"/>
+          <a:lstStyle/>
+          <a:p>
+            <a:pPr algn="r" indent="0" marL="0">
+              <a:buNone/>
+            </a:pPr>
+            <a:r>
+              <a:rPr lang="en-US" sz="1250" dirty="0">
+                <a:solidFill>
+                  <a:srgbClr val="3E3426"/>
+                </a:solidFill>
+                <a:latin typeface="Arial" pitchFamily="34" charset="0"/>
+                <a:ea typeface="Arial" pitchFamily="34" charset="-122"/>
+                <a:cs typeface="Arial" pitchFamily="34" charset="-120"/>
+              </a:rPr>
+              <a:t>דיון בטקסט קלאסי</a:t>
+            </a:r>
+            <a:endParaRPr lang="en-US" sz="1250" dirty="0"/>
+          </a:p>
+        </p:txBody>
+      </p:sp>
+      <p:sp>
+        <p:nvSpPr>
+          <p:cNvPr id="26" name="Shape 22"/>
+          <p:cNvSpPr/>
+          <p:nvPr/>
+        </p:nvSpPr>
+        <p:spPr>
+          <a:xfrm>
+            <a:off x="5528920" y="3557016"/>
+            <a:ext cx="73152" cy="73152"/>
+          </a:xfrm>
+          <a:prstGeom prst="ellipse">
+            <a:avLst/>
+          </a:prstGeom>
+          <a:solidFill>
+            <a:srgbClr val="5E7B47"/>
+          </a:solidFill>
+          <a:ln/>
+        </p:spPr>
+      </p:sp>
+      <p:sp>
+        <p:nvSpPr>
+          <p:cNvPr id="27" name="Text 23"/>
+          <p:cNvSpPr/>
+          <p:nvPr/>
+        </p:nvSpPr>
+        <p:spPr>
+          <a:xfrm>
+            <a:off x="868680" y="3438144"/>
+            <a:ext cx="4495648" cy="292608"/>
+          </a:xfrm>
+          <a:prstGeom prst="rect">
+            <a:avLst/>
+          </a:prstGeom>
+          <a:noFill/>
+          <a:ln/>
+        </p:spPr>
+        <p:txBody>
+          <a:bodyPr wrap="square" lIns="0" tIns="0" rIns="0" bIns="0" rtlCol="0" anchor="ctr"/>
+          <a:lstStyle/>
+          <a:p>
+            <a:pPr algn="r" indent="0" marL="0">
+              <a:buNone/>
+            </a:pPr>
+            <a:r>
+              <a:rPr lang="en-US" sz="1250" dirty="0">
+                <a:solidFill>
+                  <a:srgbClr val="3E3426"/>
+                </a:solidFill>
+                <a:latin typeface="Arial" pitchFamily="34" charset="0"/>
+                <a:ea typeface="Arial" pitchFamily="34" charset="-122"/>
+                <a:cs typeface="Arial" pitchFamily="34" charset="-120"/>
+              </a:rPr>
+              <a:t>מעגל שירה</a:t>
+            </a:r>
+            <a:endParaRPr lang="en-US" sz="1250" dirty="0"/>
+          </a:p>
+        </p:txBody>
+      </p:sp>
+      <p:sp>
+        <p:nvSpPr>
+          <p:cNvPr id="28" name="Shape 24"/>
+          <p:cNvSpPr/>
+          <p:nvPr/>
+        </p:nvSpPr>
+        <p:spPr>
+          <a:xfrm>
+            <a:off x="6278728" y="4114800"/>
+            <a:ext cx="5272888" cy="2011680"/>
           </a:xfrm>
           <a:prstGeom prst="roundRect">
             <a:avLst>
-              <a:gd name="adj" fmla="val 2156"/>
+              <a:gd name="adj" fmla="val 3636"/>
             </a:avLst>
           </a:prstGeom>
           <a:solidFill>
-            <a:srgbClr val="FFFFFF"/>
+            <a:srgbClr val="F3E9D2"/>
           </a:solidFill>
           <a:ln w="12700">
             <a:solidFill>
-              <a:srgbClr val="E4DDCB"/>
+              <a:srgbClr val="9C7B34"/>
             </a:solidFill>
             <a:prstDash val="solid"/>
           </a:ln>
@@ -9578,27 +10384,27 @@
       </p:sp>
       <p:sp>
         <p:nvSpPr>
-          <p:cNvPr id="15" name="Shape 11"/>
-          <p:cNvSpPr/>
-          <p:nvPr/>
-        </p:nvSpPr>
-        <p:spPr>
-          <a:xfrm>
-            <a:off x="1948129" y="2308860"/>
-            <a:ext cx="777240" cy="777240"/>
+          <p:cNvPr id="29" name="Shape 25"/>
+          <p:cNvSpPr/>
+          <p:nvPr/>
+        </p:nvSpPr>
+        <p:spPr>
+          <a:xfrm>
+            <a:off x="10737799" y="4261104"/>
+            <a:ext cx="621792" cy="621792"/>
           </a:xfrm>
           <a:prstGeom prst="ellipse">
             <a:avLst/>
           </a:prstGeom>
           <a:solidFill>
-            <a:srgbClr val="5E7B47"/>
+            <a:srgbClr val="9C7B34"/>
           </a:solidFill>
           <a:ln/>
         </p:spPr>
       </p:sp>
       <p:pic>
         <p:nvPicPr>
-          <p:cNvPr id="16" name="Image 2" descr="/tmp/claude-0/-home-user-Ein-Prat-work/bfe443db-e493-5438-add8-ac2e37bc83f4/scratchpad/pptx-build/icons/cupcake.png">    </p:cNvPr>
+          <p:cNvPr id="30" name="Image 2" descr="/tmp/claude-0/-home-user-Ein-Prat-work/bfe443db-e493-5438-add8-ac2e37bc83f4/scratchpad/pptx-build/icons/heart.png">    </p:cNvPr>
           <p:cNvPicPr>
             <a:picLocks noChangeAspect="1"/>
           </p:cNvPicPr>
@@ -9612,8 +10418,8 @@
         </p:blipFill>
         <p:spPr>
           <a:xfrm>
-            <a:off x="2134667" y="2495398"/>
-            <a:ext cx="404165" cy="404165"/>
+            <a:off x="10887029" y="4410334"/>
+            <a:ext cx="323332" cy="323332"/>
           </a:xfrm>
           <a:prstGeom prst="rect">
             <a:avLst/>
@@ -9622,14 +10428,14 @@
       </p:pic>
       <p:sp>
         <p:nvSpPr>
-          <p:cNvPr id="17" name="Text 12"/>
-          <p:cNvSpPr/>
-          <p:nvPr/>
-        </p:nvSpPr>
-        <p:spPr>
-          <a:xfrm>
-            <a:off x="822960" y="3291840"/>
-            <a:ext cx="3027578" cy="548640"/>
+          <p:cNvPr id="31" name="Text 26"/>
+          <p:cNvSpPr/>
+          <p:nvPr/>
+        </p:nvSpPr>
+        <p:spPr>
+          <a:xfrm>
+            <a:off x="6507328" y="4297680"/>
+            <a:ext cx="4267048" cy="502920"/>
           </a:xfrm>
           <a:prstGeom prst="rect">
             <a:avLst/>
@@ -9641,11 +10447,11 @@
           <a:bodyPr wrap="square" lIns="0" tIns="0" rIns="0" bIns="0" rtlCol="0" anchor="ctr"/>
           <a:lstStyle/>
           <a:p>
-            <a:pPr algn="ctr" indent="0" marL="0">
+            <a:pPr algn="r" indent="0" marL="0">
               <a:buNone/>
             </a:pPr>
             <a:r>
-              <a:rPr lang="en-US" sz="1600" b="1" dirty="0">
+              <a:rPr lang="en-US" sz="1650" b="1" dirty="0">
                 <a:solidFill>
                   <a:srgbClr val="3E3426"/>
                 </a:solidFill>
@@ -9653,22 +10459,42 @@
                 <a:ea typeface="Cambria" pitchFamily="34" charset="-122"/>
                 <a:cs typeface="Cambria" pitchFamily="34" charset="-120"/>
               </a:rPr>
-              <a:t>משמר פילוסופיית המזרח</a:t>
+              <a:t>סיום — תמיד אינטראקטיבי</a:t>
             </a:r>
-            <a:endParaRPr lang="en-US" sz="1600" dirty="0"/>
+            <a:endParaRPr lang="en-US" sz="1650" dirty="0"/>
           </a:p>
         </p:txBody>
       </p:sp>
       <p:sp>
         <p:nvSpPr>
-          <p:cNvPr id="18" name="Text 13"/>
-          <p:cNvSpPr/>
-          <p:nvPr/>
-        </p:nvSpPr>
-        <p:spPr>
-          <a:xfrm>
-            <a:off x="868680" y="3886200"/>
-            <a:ext cx="2936138" cy="1463040"/>
+          <p:cNvPr id="32" name="Shape 27"/>
+          <p:cNvSpPr/>
+          <p:nvPr/>
+        </p:nvSpPr>
+        <p:spPr>
+          <a:xfrm>
+            <a:off x="11167567" y="4965192"/>
+            <a:ext cx="73152" cy="73152"/>
+          </a:xfrm>
+          <a:prstGeom prst="ellipse">
+            <a:avLst/>
+          </a:prstGeom>
+          <a:solidFill>
+            <a:srgbClr val="9C7B34"/>
+          </a:solidFill>
+          <a:ln/>
+        </p:spPr>
+      </p:sp>
+      <p:sp>
+        <p:nvSpPr>
+          <p:cNvPr id="33" name="Text 28"/>
+          <p:cNvSpPr/>
+          <p:nvPr/>
+        </p:nvSpPr>
+        <p:spPr>
+          <a:xfrm>
+            <a:off x="6507328" y="4846320"/>
+            <a:ext cx="4495648" cy="292608"/>
           </a:xfrm>
           <a:prstGeom prst="rect">
             <a:avLst/>
@@ -9677,22 +10503,22 @@
           <a:ln/>
         </p:spPr>
         <p:txBody>
-          <a:bodyPr wrap="square" lIns="0" tIns="0" rIns="0" bIns="0" rtlCol="0" anchor="t"/>
+          <a:bodyPr wrap="square" lIns="0" tIns="0" rIns="0" bIns="0" rtlCol="0" anchor="ctr"/>
           <a:lstStyle/>
           <a:p>
-            <a:pPr algn="ctr" indent="0" marL="0">
+            <a:pPr algn="r" indent="0" marL="0">
               <a:buNone/>
             </a:pPr>
             <a:r>
               <a:rPr lang="en-US" sz="1250" dirty="0">
                 <a:solidFill>
-                  <a:srgbClr val="6E6250"/>
+                  <a:srgbClr val="3E3426"/>
                 </a:solidFill>
                 <a:latin typeface="Arial" pitchFamily="34" charset="0"/>
                 <a:ea typeface="Arial" pitchFamily="34" charset="-122"/>
                 <a:cs typeface="Arial" pitchFamily="34" charset="-120"/>
               </a:rPr>
-              <a:t>שיעורים + ארוחת ערב בנושא "פוקי בול" + קישוט תמטי (קרפ אדום, סמלים סיניים)</a:t>
+              <a:t>חבורות בטקסט</a:t>
             </a:r>
             <a:endParaRPr lang="en-US" sz="1250" dirty="0"/>
           </a:p>
@@ -9700,14 +10526,34 @@
       </p:sp>
       <p:sp>
         <p:nvSpPr>
-          <p:cNvPr id="19" name="Text 14"/>
-          <p:cNvSpPr/>
-          <p:nvPr/>
-        </p:nvSpPr>
-        <p:spPr>
-          <a:xfrm>
-            <a:off x="640080" y="5760720"/>
-            <a:ext cx="10911535" cy="457200"/>
+          <p:cNvPr id="34" name="Shape 29"/>
+          <p:cNvSpPr/>
+          <p:nvPr/>
+        </p:nvSpPr>
+        <p:spPr>
+          <a:xfrm>
+            <a:off x="11167567" y="5257800"/>
+            <a:ext cx="73152" cy="73152"/>
+          </a:xfrm>
+          <a:prstGeom prst="ellipse">
+            <a:avLst/>
+          </a:prstGeom>
+          <a:solidFill>
+            <a:srgbClr val="9C7B34"/>
+          </a:solidFill>
+          <a:ln/>
+        </p:spPr>
+      </p:sp>
+      <p:sp>
+        <p:nvSpPr>
+          <p:cNvPr id="35" name="Text 30"/>
+          <p:cNvSpPr/>
+          <p:nvPr/>
+        </p:nvSpPr>
+        <p:spPr>
+          <a:xfrm>
+            <a:off x="6507328" y="5138928"/>
+            <a:ext cx="4495648" cy="292608"/>
           </a:xfrm>
           <a:prstGeom prst="rect">
             <a:avLst/>
@@ -9719,27 +10565,498 @@
           <a:bodyPr wrap="square" lIns="0" tIns="0" rIns="0" bIns="0" rtlCol="0" anchor="ctr"/>
           <a:lstStyle/>
           <a:p>
-            <a:pPr algn="ctr" indent="0" marL="0">
+            <a:pPr algn="r" indent="0" marL="0">
               <a:buNone/>
             </a:pPr>
             <a:r>
-              <a:rPr lang="en-US" sz="1500" b="1" i="1" dirty="0">
+              <a:rPr lang="en-US" sz="1250" dirty="0">
                 <a:solidFill>
-                  <a:srgbClr val="9C7B34"/>
+                  <a:srgbClr val="3E3426"/>
                 </a:solidFill>
                 <a:latin typeface="Arial" pitchFamily="34" charset="0"/>
                 <a:ea typeface="Arial" pitchFamily="34" charset="-122"/>
                 <a:cs typeface="Arial" pitchFamily="34" charset="-120"/>
               </a:rPr>
-              <a:t>תבנו את הלילה שמתאים לנושא שלכם — לא את התבנית.</a:t>
+              <a:t>טד אישי</a:t>
             </a:r>
-            <a:endParaRPr lang="en-US" sz="1500" dirty="0"/>
+            <a:endParaRPr lang="en-US" sz="1250" dirty="0"/>
           </a:p>
         </p:txBody>
       </p:sp>
       <p:sp>
         <p:nvSpPr>
-          <p:cNvPr id="20" name="Text 15"/>
+          <p:cNvPr id="36" name="Shape 31"/>
+          <p:cNvSpPr/>
+          <p:nvPr/>
+        </p:nvSpPr>
+        <p:spPr>
+          <a:xfrm>
+            <a:off x="11167567" y="5550408"/>
+            <a:ext cx="73152" cy="73152"/>
+          </a:xfrm>
+          <a:prstGeom prst="ellipse">
+            <a:avLst/>
+          </a:prstGeom>
+          <a:solidFill>
+            <a:srgbClr val="9C7B34"/>
+          </a:solidFill>
+          <a:ln/>
+        </p:spPr>
+      </p:sp>
+      <p:sp>
+        <p:nvSpPr>
+          <p:cNvPr id="37" name="Text 32"/>
+          <p:cNvSpPr/>
+          <p:nvPr/>
+        </p:nvSpPr>
+        <p:spPr>
+          <a:xfrm>
+            <a:off x="6507328" y="5431536"/>
+            <a:ext cx="4495648" cy="292608"/>
+          </a:xfrm>
+          <a:prstGeom prst="rect">
+            <a:avLst/>
+          </a:prstGeom>
+          <a:noFill/>
+          <a:ln/>
+        </p:spPr>
+        <p:txBody>
+          <a:bodyPr wrap="square" lIns="0" tIns="0" rIns="0" bIns="0" rtlCol="0" anchor="ctr"/>
+          <a:lstStyle/>
+          <a:p>
+            <a:pPr algn="r" indent="0" marL="0">
+              <a:buNone/>
+            </a:pPr>
+            <a:r>
+              <a:rPr lang="en-US" sz="1250" dirty="0">
+                <a:solidFill>
+                  <a:srgbClr val="3E3426"/>
+                </a:solidFill>
+                <a:latin typeface="Arial" pitchFamily="34" charset="0"/>
+                <a:ea typeface="Arial" pitchFamily="34" charset="-122"/>
+                <a:cs typeface="Arial" pitchFamily="34" charset="-120"/>
+              </a:rPr>
+              <a:t>כתיבה מודרכת</a:t>
+            </a:r>
+            <a:endParaRPr lang="en-US" sz="1250" dirty="0"/>
+          </a:p>
+        </p:txBody>
+      </p:sp>
+      <p:sp>
+        <p:nvSpPr>
+          <p:cNvPr id="38" name="Shape 33"/>
+          <p:cNvSpPr/>
+          <p:nvPr/>
+        </p:nvSpPr>
+        <p:spPr>
+          <a:xfrm>
+            <a:off x="11167567" y="5843016"/>
+            <a:ext cx="73152" cy="73152"/>
+          </a:xfrm>
+          <a:prstGeom prst="ellipse">
+            <a:avLst/>
+          </a:prstGeom>
+          <a:solidFill>
+            <a:srgbClr val="9C7B34"/>
+          </a:solidFill>
+          <a:ln/>
+        </p:spPr>
+      </p:sp>
+      <p:sp>
+        <p:nvSpPr>
+          <p:cNvPr id="39" name="Text 34"/>
+          <p:cNvSpPr/>
+          <p:nvPr/>
+        </p:nvSpPr>
+        <p:spPr>
+          <a:xfrm>
+            <a:off x="6507328" y="5724144"/>
+            <a:ext cx="4495648" cy="292608"/>
+          </a:xfrm>
+          <a:prstGeom prst="rect">
+            <a:avLst/>
+          </a:prstGeom>
+          <a:noFill/>
+          <a:ln/>
+        </p:spPr>
+        <p:txBody>
+          <a:bodyPr wrap="square" lIns="0" tIns="0" rIns="0" bIns="0" rtlCol="0" anchor="ctr"/>
+          <a:lstStyle/>
+          <a:p>
+            <a:pPr algn="r" indent="0" marL="0">
+              <a:buNone/>
+            </a:pPr>
+            <a:r>
+              <a:rPr lang="en-US" sz="1250" dirty="0">
+                <a:solidFill>
+                  <a:srgbClr val="3E3426"/>
+                </a:solidFill>
+                <a:latin typeface="Arial" pitchFamily="34" charset="0"/>
+                <a:ea typeface="Arial" pitchFamily="34" charset="-122"/>
+                <a:cs typeface="Arial" pitchFamily="34" charset="-120"/>
+              </a:rPr>
+              <a:t>דיבייט</a:t>
+            </a:r>
+            <a:endParaRPr lang="en-US" sz="1250" dirty="0"/>
+          </a:p>
+        </p:txBody>
+      </p:sp>
+      <p:sp>
+        <p:nvSpPr>
+          <p:cNvPr id="40" name="Shape 35"/>
+          <p:cNvSpPr/>
+          <p:nvPr/>
+        </p:nvSpPr>
+        <p:spPr>
+          <a:xfrm>
+            <a:off x="640080" y="4114800"/>
+            <a:ext cx="5272888" cy="2011680"/>
+          </a:xfrm>
+          <a:prstGeom prst="roundRect">
+            <a:avLst>
+              <a:gd name="adj" fmla="val 3636"/>
+            </a:avLst>
+          </a:prstGeom>
+          <a:solidFill>
+            <a:srgbClr val="E4E6EF"/>
+          </a:solidFill>
+          <a:ln w="12700">
+            <a:solidFill>
+              <a:srgbClr val="5B6E8C"/>
+            </a:solidFill>
+            <a:prstDash val="solid"/>
+          </a:ln>
+          <a:effectLst>
+            <a:outerShdw sx="100000" sy="100000" kx="0" ky="0" algn="bl" rotWithShape="0" blurRad="101600" dist="25400" dir="5400000">
+              <a:srgbClr val="000000">
+                <a:alpha val="12000"/>
+              </a:srgbClr>
+            </a:outerShdw>
+          </a:effectLst>
+        </p:spPr>
+      </p:sp>
+      <p:sp>
+        <p:nvSpPr>
+          <p:cNvPr id="41" name="Shape 36"/>
+          <p:cNvSpPr/>
+          <p:nvPr/>
+        </p:nvSpPr>
+        <p:spPr>
+          <a:xfrm>
+            <a:off x="5099152" y="4261104"/>
+            <a:ext cx="621792" cy="621792"/>
+          </a:xfrm>
+          <a:prstGeom prst="ellipse">
+            <a:avLst/>
+          </a:prstGeom>
+          <a:solidFill>
+            <a:srgbClr val="5B6E8C"/>
+          </a:solidFill>
+          <a:ln/>
+        </p:spPr>
+      </p:sp>
+      <p:pic>
+        <p:nvPicPr>
+          <p:cNvPr id="42" name="Image 3" descr="/tmp/claude-0/-home-user-Ein-Prat-work/bfe443db-e493-5438-add8-ac2e37bc83f4/scratchpad/pptx-build/icons/partyPopper.png">    </p:cNvPr>
+          <p:cNvPicPr>
+            <a:picLocks noChangeAspect="1"/>
+          </p:cNvPicPr>
+          <p:nvPr/>
+        </p:nvPicPr>
+        <p:blipFill>
+          <a:blip r:embed="rId4"/>
+          <a:stretch>
+            <a:fillRect/>
+          </a:stretch>
+        </p:blipFill>
+        <p:spPr>
+          <a:xfrm>
+            <a:off x="5248382" y="4410334"/>
+            <a:ext cx="323332" cy="323332"/>
+          </a:xfrm>
+          <a:prstGeom prst="rect">
+            <a:avLst/>
+          </a:prstGeom>
+        </p:spPr>
+      </p:pic>
+      <p:sp>
+        <p:nvSpPr>
+          <p:cNvPr id="43" name="Text 37"/>
+          <p:cNvSpPr/>
+          <p:nvPr/>
+        </p:nvSpPr>
+        <p:spPr>
+          <a:xfrm>
+            <a:off x="868680" y="4297680"/>
+            <a:ext cx="4267048" cy="502920"/>
+          </a:xfrm>
+          <a:prstGeom prst="rect">
+            <a:avLst/>
+          </a:prstGeom>
+          <a:noFill/>
+          <a:ln/>
+        </p:spPr>
+        <p:txBody>
+          <a:bodyPr wrap="square" lIns="0" tIns="0" rIns="0" bIns="0" rtlCol="0" anchor="ctr"/>
+          <a:lstStyle/>
+          <a:p>
+            <a:pPr algn="r" indent="0" marL="0">
+              <a:buNone/>
+            </a:pPr>
+            <a:r>
+              <a:rPr lang="en-US" sz="1650" b="1" dirty="0">
+                <a:solidFill>
+                  <a:srgbClr val="3E3426"/>
+                </a:solidFill>
+                <a:latin typeface="Cambria" pitchFamily="34" charset="0"/>
+                <a:ea typeface="Cambria" pitchFamily="34" charset="-122"/>
+                <a:cs typeface="Cambria" pitchFamily="34" charset="-120"/>
+              </a:rPr>
+              <a:t>תוספת מיוחדת (לא חובה)</a:t>
+            </a:r>
+            <a:endParaRPr lang="en-US" sz="1650" dirty="0"/>
+          </a:p>
+        </p:txBody>
+      </p:sp>
+      <p:sp>
+        <p:nvSpPr>
+          <p:cNvPr id="44" name="Shape 38"/>
+          <p:cNvSpPr/>
+          <p:nvPr/>
+        </p:nvSpPr>
+        <p:spPr>
+          <a:xfrm>
+            <a:off x="5528920" y="4965192"/>
+            <a:ext cx="73152" cy="73152"/>
+          </a:xfrm>
+          <a:prstGeom prst="ellipse">
+            <a:avLst/>
+          </a:prstGeom>
+          <a:solidFill>
+            <a:srgbClr val="5B6E8C"/>
+          </a:solidFill>
+          <a:ln/>
+        </p:spPr>
+      </p:sp>
+      <p:sp>
+        <p:nvSpPr>
+          <p:cNvPr id="45" name="Text 39"/>
+          <p:cNvSpPr/>
+          <p:nvPr/>
+        </p:nvSpPr>
+        <p:spPr>
+          <a:xfrm>
+            <a:off x="868680" y="4846320"/>
+            <a:ext cx="4495648" cy="292608"/>
+          </a:xfrm>
+          <a:prstGeom prst="rect">
+            <a:avLst/>
+          </a:prstGeom>
+          <a:noFill/>
+          <a:ln/>
+        </p:spPr>
+        <p:txBody>
+          <a:bodyPr wrap="square" lIns="0" tIns="0" rIns="0" bIns="0" rtlCol="0" anchor="ctr"/>
+          <a:lstStyle/>
+          <a:p>
+            <a:pPr algn="r" indent="0" marL="0">
+              <a:buNone/>
+            </a:pPr>
+            <a:r>
+              <a:rPr lang="en-US" sz="1250" dirty="0">
+                <a:solidFill>
+                  <a:srgbClr val="3E3426"/>
+                </a:solidFill>
+                <a:latin typeface="Arial" pitchFamily="34" charset="0"/>
+                <a:ea typeface="Arial" pitchFamily="34" charset="-122"/>
+                <a:cs typeface="Arial" pitchFamily="34" charset="-120"/>
+              </a:rPr>
+              <a:t>ארוחת ערב בנושא</a:t>
+            </a:r>
+            <a:endParaRPr lang="en-US" sz="1250" dirty="0"/>
+          </a:p>
+        </p:txBody>
+      </p:sp>
+      <p:sp>
+        <p:nvSpPr>
+          <p:cNvPr id="46" name="Shape 40"/>
+          <p:cNvSpPr/>
+          <p:nvPr/>
+        </p:nvSpPr>
+        <p:spPr>
+          <a:xfrm>
+            <a:off x="5528920" y="5257800"/>
+            <a:ext cx="73152" cy="73152"/>
+          </a:xfrm>
+          <a:prstGeom prst="ellipse">
+            <a:avLst/>
+          </a:prstGeom>
+          <a:solidFill>
+            <a:srgbClr val="5B6E8C"/>
+          </a:solidFill>
+          <a:ln/>
+        </p:spPr>
+      </p:sp>
+      <p:sp>
+        <p:nvSpPr>
+          <p:cNvPr id="47" name="Text 41"/>
+          <p:cNvSpPr/>
+          <p:nvPr/>
+        </p:nvSpPr>
+        <p:spPr>
+          <a:xfrm>
+            <a:off x="868680" y="5138928"/>
+            <a:ext cx="4495648" cy="292608"/>
+          </a:xfrm>
+          <a:prstGeom prst="rect">
+            <a:avLst/>
+          </a:prstGeom>
+          <a:noFill/>
+          <a:ln/>
+        </p:spPr>
+        <p:txBody>
+          <a:bodyPr wrap="square" lIns="0" tIns="0" rIns="0" bIns="0" rtlCol="0" anchor="ctr"/>
+          <a:lstStyle/>
+          <a:p>
+            <a:pPr algn="r" indent="0" marL="0">
+              <a:buNone/>
+            </a:pPr>
+            <a:r>
+              <a:rPr lang="en-US" sz="1250" dirty="0">
+                <a:solidFill>
+                  <a:srgbClr val="3E3426"/>
+                </a:solidFill>
+                <a:latin typeface="Arial" pitchFamily="34" charset="0"/>
+                <a:ea typeface="Arial" pitchFamily="34" charset="-122"/>
+                <a:cs typeface="Arial" pitchFamily="34" charset="-120"/>
+              </a:rPr>
+              <a:t>קישוט תמטי</a:t>
+            </a:r>
+            <a:endParaRPr lang="en-US" sz="1250" dirty="0"/>
+          </a:p>
+        </p:txBody>
+      </p:sp>
+      <p:sp>
+        <p:nvSpPr>
+          <p:cNvPr id="48" name="Shape 42"/>
+          <p:cNvSpPr/>
+          <p:nvPr/>
+        </p:nvSpPr>
+        <p:spPr>
+          <a:xfrm>
+            <a:off x="5528920" y="5550408"/>
+            <a:ext cx="73152" cy="73152"/>
+          </a:xfrm>
+          <a:prstGeom prst="ellipse">
+            <a:avLst/>
+          </a:prstGeom>
+          <a:solidFill>
+            <a:srgbClr val="5B6E8C"/>
+          </a:solidFill>
+          <a:ln/>
+        </p:spPr>
+      </p:sp>
+      <p:sp>
+        <p:nvSpPr>
+          <p:cNvPr id="49" name="Text 43"/>
+          <p:cNvSpPr/>
+          <p:nvPr/>
+        </p:nvSpPr>
+        <p:spPr>
+          <a:xfrm>
+            <a:off x="868680" y="5431536"/>
+            <a:ext cx="4495648" cy="292608"/>
+          </a:xfrm>
+          <a:prstGeom prst="rect">
+            <a:avLst/>
+          </a:prstGeom>
+          <a:noFill/>
+          <a:ln/>
+        </p:spPr>
+        <p:txBody>
+          <a:bodyPr wrap="square" lIns="0" tIns="0" rIns="0" bIns="0" rtlCol="0" anchor="ctr"/>
+          <a:lstStyle/>
+          <a:p>
+            <a:pPr algn="r" indent="0" marL="0">
+              <a:buNone/>
+            </a:pPr>
+            <a:r>
+              <a:rPr lang="en-US" sz="1250" dirty="0">
+                <a:solidFill>
+                  <a:srgbClr val="3E3426"/>
+                </a:solidFill>
+                <a:latin typeface="Arial" pitchFamily="34" charset="0"/>
+                <a:ea typeface="Arial" pitchFamily="34" charset="-122"/>
+                <a:cs typeface="Arial" pitchFamily="34" charset="-120"/>
+              </a:rPr>
+              <a:t>שולחן זיכרון / פריטים אישיים</a:t>
+            </a:r>
+            <a:endParaRPr lang="en-US" sz="1250" dirty="0"/>
+          </a:p>
+        </p:txBody>
+      </p:sp>
+      <p:sp>
+        <p:nvSpPr>
+          <p:cNvPr id="50" name="Shape 44"/>
+          <p:cNvSpPr/>
+          <p:nvPr/>
+        </p:nvSpPr>
+        <p:spPr>
+          <a:xfrm>
+            <a:off x="5528920" y="5843016"/>
+            <a:ext cx="73152" cy="73152"/>
+          </a:xfrm>
+          <a:prstGeom prst="ellipse">
+            <a:avLst/>
+          </a:prstGeom>
+          <a:solidFill>
+            <a:srgbClr val="5B6E8C"/>
+          </a:solidFill>
+          <a:ln/>
+        </p:spPr>
+      </p:sp>
+      <p:sp>
+        <p:nvSpPr>
+          <p:cNvPr id="51" name="Text 45"/>
+          <p:cNvSpPr/>
+          <p:nvPr/>
+        </p:nvSpPr>
+        <p:spPr>
+          <a:xfrm>
+            <a:off x="868680" y="5724144"/>
+            <a:ext cx="4495648" cy="292608"/>
+          </a:xfrm>
+          <a:prstGeom prst="rect">
+            <a:avLst/>
+          </a:prstGeom>
+          <a:noFill/>
+          <a:ln/>
+        </p:spPr>
+        <p:txBody>
+          <a:bodyPr wrap="square" lIns="0" tIns="0" rIns="0" bIns="0" rtlCol="0" anchor="ctr"/>
+          <a:lstStyle/>
+          <a:p>
+            <a:pPr algn="r" indent="0" marL="0">
+              <a:buNone/>
+            </a:pPr>
+            <a:r>
+              <a:rPr lang="en-US" sz="1250" dirty="0">
+                <a:solidFill>
+                  <a:srgbClr val="3E3426"/>
+                </a:solidFill>
+                <a:latin typeface="Arial" pitchFamily="34" charset="0"/>
+                <a:ea typeface="Arial" pitchFamily="34" charset="-122"/>
+                <a:cs typeface="Arial" pitchFamily="34" charset="-120"/>
+              </a:rPr>
+              <a:t>לימוד רשות</a:t>
+            </a:r>
+            <a:endParaRPr lang="en-US" sz="1250" dirty="0"/>
+          </a:p>
+        </p:txBody>
+      </p:sp>
+      <p:sp>
+        <p:nvSpPr>
+          <p:cNvPr id="52" name="Text 46"/>
           <p:cNvSpPr/>
           <p:nvPr/>
         </p:nvSpPr>
@@ -9778,7 +11095,7 @@
       </p:sp>
       <p:sp>
         <p:nvSpPr>
-          <p:cNvPr id="21" name="Text 16"/>
+          <p:cNvPr id="53" name="Text 47"/>
           <p:cNvSpPr/>
           <p:nvPr/>
         </p:nvSpPr>
@@ -10475,7 +11792,7 @@
                 <a:ea typeface="Arial" pitchFamily="34" charset="-122"/>
                 <a:cs typeface="Arial" pitchFamily="34" charset="-120"/>
               </a:rPr>
-              <a:t>חבורות / טד / כתיבה / דיבייט — תמיד אינטראקטיבי</a:t>
+              <a:t>חבורות / טד / כתיבה / דיבייט — תמיד אינטראקטיבי. זה המקום שלכם להתבטא</a:t>
             </a:r>
             <a:endParaRPr lang="en-US" sz="1500" dirty="0"/>
           </a:p>
@@ -12235,7 +13552,7 @@
                           <a:ea typeface="Arial" pitchFamily="34" charset="-122"/>
                           <a:cs typeface="Arial" pitchFamily="34" charset="-120"/>
                         </a:rPr>
-                        <a:t>משמר בוגרים</a:t>
+                        <a:t>משמר בוגרים — נבנה על ידי הצוות</a:t>
                       </a:r>
                       <a:endParaRPr lang="en-US" sz="1150" dirty="0">
                         <a:latin typeface="Arial" charset="0"/>
@@ -12300,7 +13617,7 @@
                           <a:ea typeface="Arial" pitchFamily="34" charset="-122"/>
                           <a:cs typeface="Arial" pitchFamily="34" charset="-120"/>
                         </a:rPr>
-                        <a:t>חניך 10 + חניך 6</a:t>
+                        <a:t>צוות</a:t>
                       </a:r>
                       <a:endParaRPr lang="en-US" sz="1150" dirty="0">
                         <a:latin typeface="Arial" charset="0"/>
@@ -12561,6 +13878,398 @@
                           <a:cs typeface="Arial" pitchFamily="34" charset="-120"/>
                         </a:rPr>
                         <a:t>01</a:t>
+                      </a:r>
+                      <a:endParaRPr lang="en-US" sz="1150" dirty="0">
+                        <a:latin typeface="Arial" charset="0"/>
+                        <a:ea typeface="Arial" charset="0"/>
+                        <a:cs typeface="Arial" charset="0"/>
+                      </a:endParaRPr>
+                    </a:p>
+                  </a:txBody>
+                  <a:tcPr marL="73152" marR="73152" marT="27432" marB="27432" anchor="ctr">
+                    <a:lnL w="9525" cap="flat" cmpd="sng" algn="ctr">
+                      <a:solidFill>
+                        <a:srgbClr val="E4DDCB"/>
+                      </a:solidFill>
+                      <a:prstDash val="solid"/>
+                      <a:round/>
+                      <a:headEnd type="none" w="med" len="med"/>
+                      <a:tailEnd type="none" w="med" len="med"/>
+                    </a:lnL>
+                    <a:lnR w="9525" cap="flat" cmpd="sng" algn="ctr">
+                      <a:solidFill>
+                        <a:srgbClr val="E4DDCB"/>
+                      </a:solidFill>
+                      <a:prstDash val="solid"/>
+                      <a:round/>
+                      <a:headEnd type="none" w="med" len="med"/>
+                      <a:tailEnd type="none" w="med" len="med"/>
+                    </a:lnR>
+                    <a:lnT w="9525" cap="flat" cmpd="sng" algn="ctr">
+                      <a:solidFill>
+                        <a:srgbClr val="E4DDCB"/>
+                      </a:solidFill>
+                      <a:prstDash val="solid"/>
+                      <a:round/>
+                      <a:headEnd type="none" w="med" len="med"/>
+                      <a:tailEnd type="none" w="med" len="med"/>
+                    </a:lnT>
+                    <a:lnB w="9525" cap="flat" cmpd="sng" algn="ctr">
+                      <a:solidFill>
+                        <a:srgbClr val="E4DDCB"/>
+                      </a:solidFill>
+                      <a:prstDash val="solid"/>
+                      <a:round/>
+                      <a:headEnd type="none" w="med" len="med"/>
+                      <a:tailEnd type="none" w="med" len="med"/>
+                    </a:lnB>
+                  </a:tcPr>
+                </a:tc>
+              </a:tr>
+              <a:tr h="392430">
+                <a:tc>
+                  <a:txBody>
+                    <a:bodyPr/>
+                    <a:lstStyle/>
+                    <a:p>
+                      <a:pPr algn="r" indent="0" marL="0">
+                        <a:buNone/>
+                      </a:pPr>
+                      <a:r>
+                        <a:rPr lang="en-US" sz="1150" i="1" dirty="0">
+                          <a:solidFill>
+                            <a:srgbClr val="6E6250"/>
+                          </a:solidFill>
+                          <a:latin typeface="Arial" pitchFamily="34" charset="0"/>
+                          <a:ea typeface="Arial" pitchFamily="34" charset="-122"/>
+                          <a:cs typeface="Arial" pitchFamily="34" charset="-120"/>
+                        </a:rPr>
+                        <a:t>נבנה על ידי הצוות, כדוגמה</a:t>
+                      </a:r>
+                      <a:endParaRPr lang="en-US" sz="1150" dirty="0">
+                        <a:latin typeface="Arial" charset="0"/>
+                        <a:ea typeface="Arial" charset="0"/>
+                        <a:cs typeface="Arial" charset="0"/>
+                      </a:endParaRPr>
+                    </a:p>
+                  </a:txBody>
+                  <a:tcPr marL="73152" marR="73152" marT="27432" marB="27432" anchor="ctr">
+                    <a:lnL w="9525" cap="flat" cmpd="sng" algn="ctr">
+                      <a:solidFill>
+                        <a:srgbClr val="E4DDCB"/>
+                      </a:solidFill>
+                      <a:prstDash val="solid"/>
+                      <a:round/>
+                      <a:headEnd type="none" w="med" len="med"/>
+                      <a:tailEnd type="none" w="med" len="med"/>
+                    </a:lnL>
+                    <a:lnR w="9525" cap="flat" cmpd="sng" algn="ctr">
+                      <a:solidFill>
+                        <a:srgbClr val="E4DDCB"/>
+                      </a:solidFill>
+                      <a:prstDash val="solid"/>
+                      <a:round/>
+                      <a:headEnd type="none" w="med" len="med"/>
+                      <a:tailEnd type="none" w="med" len="med"/>
+                    </a:lnR>
+                    <a:lnT w="9525" cap="flat" cmpd="sng" algn="ctr">
+                      <a:solidFill>
+                        <a:srgbClr val="E4DDCB"/>
+                      </a:solidFill>
+                      <a:prstDash val="solid"/>
+                      <a:round/>
+                      <a:headEnd type="none" w="med" len="med"/>
+                      <a:tailEnd type="none" w="med" len="med"/>
+                    </a:lnT>
+                    <a:lnB w="9525" cap="flat" cmpd="sng" algn="ctr">
+                      <a:solidFill>
+                        <a:srgbClr val="E4DDCB"/>
+                      </a:solidFill>
+                      <a:prstDash val="solid"/>
+                      <a:round/>
+                      <a:headEnd type="none" w="med" len="med"/>
+                      <a:tailEnd type="none" w="med" len="med"/>
+                    </a:lnB>
+                  </a:tcPr>
+                </a:tc>
+                <a:tc>
+                  <a:txBody>
+                    <a:bodyPr/>
+                    <a:lstStyle/>
+                    <a:p>
+                      <a:pPr algn="r" indent="0" marL="0">
+                        <a:buNone/>
+                      </a:pPr>
+                      <a:r>
+                        <a:rPr lang="en-US" sz="1150" dirty="0">
+                          <a:solidFill>
+                            <a:srgbClr val="3E3426"/>
+                          </a:solidFill>
+                          <a:latin typeface="Arial" pitchFamily="34" charset="0"/>
+                          <a:ea typeface="Arial" pitchFamily="34" charset="-122"/>
+                          <a:cs typeface="Arial" pitchFamily="34" charset="-120"/>
+                        </a:rPr>
+                        <a:t>צוות</a:t>
+                      </a:r>
+                      <a:endParaRPr lang="en-US" sz="1150" dirty="0">
+                        <a:latin typeface="Arial" charset="0"/>
+                        <a:ea typeface="Arial" charset="0"/>
+                        <a:cs typeface="Arial" charset="0"/>
+                      </a:endParaRPr>
+                    </a:p>
+                  </a:txBody>
+                  <a:tcPr marL="73152" marR="73152" marT="27432" marB="27432" anchor="ctr">
+                    <a:lnL w="9525" cap="flat" cmpd="sng" algn="ctr">
+                      <a:solidFill>
+                        <a:srgbClr val="E4DDCB"/>
+                      </a:solidFill>
+                      <a:prstDash val="solid"/>
+                      <a:round/>
+                      <a:headEnd type="none" w="med" len="med"/>
+                      <a:tailEnd type="none" w="med" len="med"/>
+                    </a:lnL>
+                    <a:lnR w="9525" cap="flat" cmpd="sng" algn="ctr">
+                      <a:solidFill>
+                        <a:srgbClr val="E4DDCB"/>
+                      </a:solidFill>
+                      <a:prstDash val="solid"/>
+                      <a:round/>
+                      <a:headEnd type="none" w="med" len="med"/>
+                      <a:tailEnd type="none" w="med" len="med"/>
+                    </a:lnR>
+                    <a:lnT w="9525" cap="flat" cmpd="sng" algn="ctr">
+                      <a:solidFill>
+                        <a:srgbClr val="E4DDCB"/>
+                      </a:solidFill>
+                      <a:prstDash val="solid"/>
+                      <a:round/>
+                      <a:headEnd type="none" w="med" len="med"/>
+                      <a:tailEnd type="none" w="med" len="med"/>
+                    </a:lnT>
+                    <a:lnB w="9525" cap="flat" cmpd="sng" algn="ctr">
+                      <a:solidFill>
+                        <a:srgbClr val="E4DDCB"/>
+                      </a:solidFill>
+                      <a:prstDash val="solid"/>
+                      <a:round/>
+                      <a:headEnd type="none" w="med" len="med"/>
+                      <a:tailEnd type="none" w="med" len="med"/>
+                    </a:lnB>
+                  </a:tcPr>
+                </a:tc>
+                <a:tc>
+                  <a:txBody>
+                    <a:bodyPr/>
+                    <a:lstStyle/>
+                    <a:p>
+                      <a:pPr algn="r" indent="0" marL="0">
+                        <a:buNone/>
+                      </a:pPr>
+                      <a:r>
+                        <a:rPr lang="en-US" sz="1150" dirty="0">
+                          <a:solidFill>
+                            <a:srgbClr val="3E3426"/>
+                          </a:solidFill>
+                          <a:latin typeface="Arial" pitchFamily="34" charset="0"/>
+                          <a:ea typeface="Arial" pitchFamily="34" charset="-122"/>
+                          <a:cs typeface="Arial" pitchFamily="34" charset="-120"/>
+                        </a:rPr>
+                        <a:t>ו׳ תשרי תשפ״ז</a:t>
+                      </a:r>
+                      <a:endParaRPr lang="en-US" sz="1150" dirty="0">
+                        <a:latin typeface="Arial" charset="0"/>
+                        <a:ea typeface="Arial" charset="0"/>
+                        <a:cs typeface="Arial" charset="0"/>
+                      </a:endParaRPr>
+                    </a:p>
+                  </a:txBody>
+                  <a:tcPr marL="73152" marR="73152" marT="27432" marB="27432" anchor="ctr">
+                    <a:lnL w="9525" cap="flat" cmpd="sng" algn="ctr">
+                      <a:solidFill>
+                        <a:srgbClr val="E4DDCB"/>
+                      </a:solidFill>
+                      <a:prstDash val="solid"/>
+                      <a:round/>
+                      <a:headEnd type="none" w="med" len="med"/>
+                      <a:tailEnd type="none" w="med" len="med"/>
+                    </a:lnL>
+                    <a:lnR w="9525" cap="flat" cmpd="sng" algn="ctr">
+                      <a:solidFill>
+                        <a:srgbClr val="E4DDCB"/>
+                      </a:solidFill>
+                      <a:prstDash val="solid"/>
+                      <a:round/>
+                      <a:headEnd type="none" w="med" len="med"/>
+                      <a:tailEnd type="none" w="med" len="med"/>
+                    </a:lnR>
+                    <a:lnT w="9525" cap="flat" cmpd="sng" algn="ctr">
+                      <a:solidFill>
+                        <a:srgbClr val="E4DDCB"/>
+                      </a:solidFill>
+                      <a:prstDash val="solid"/>
+                      <a:round/>
+                      <a:headEnd type="none" w="med" len="med"/>
+                      <a:tailEnd type="none" w="med" len="med"/>
+                    </a:lnT>
+                    <a:lnB w="9525" cap="flat" cmpd="sng" algn="ctr">
+                      <a:solidFill>
+                        <a:srgbClr val="E4DDCB"/>
+                      </a:solidFill>
+                      <a:prstDash val="solid"/>
+                      <a:round/>
+                      <a:headEnd type="none" w="med" len="med"/>
+                      <a:tailEnd type="none" w="med" len="med"/>
+                    </a:lnB>
+                  </a:tcPr>
+                </a:tc>
+                <a:tc>
+                  <a:txBody>
+                    <a:bodyPr/>
+                    <a:lstStyle/>
+                    <a:p>
+                      <a:pPr algn="ctr" indent="0" marL="0">
+                        <a:buNone/>
+                      </a:pPr>
+                      <a:r>
+                        <a:rPr lang="en-US" sz="1150" dirty="0">
+                          <a:solidFill>
+                            <a:srgbClr val="3E3426"/>
+                          </a:solidFill>
+                          <a:latin typeface="Arial" pitchFamily="34" charset="0"/>
+                          <a:ea typeface="Arial" pitchFamily="34" charset="-122"/>
+                          <a:cs typeface="Arial" pitchFamily="34" charset="-120"/>
+                        </a:rPr>
+                        <a:t>17.9.2026</a:t>
+                      </a:r>
+                      <a:endParaRPr lang="en-US" sz="1150" dirty="0">
+                        <a:latin typeface="Arial" charset="0"/>
+                        <a:ea typeface="Arial" charset="0"/>
+                        <a:cs typeface="Arial" charset="0"/>
+                      </a:endParaRPr>
+                    </a:p>
+                  </a:txBody>
+                  <a:tcPr marL="73152" marR="73152" marT="27432" marB="27432" anchor="ctr">
+                    <a:lnL w="9525" cap="flat" cmpd="sng" algn="ctr">
+                      <a:solidFill>
+                        <a:srgbClr val="E4DDCB"/>
+                      </a:solidFill>
+                      <a:prstDash val="solid"/>
+                      <a:round/>
+                      <a:headEnd type="none" w="med" len="med"/>
+                      <a:tailEnd type="none" w="med" len="med"/>
+                    </a:lnL>
+                    <a:lnR w="9525" cap="flat" cmpd="sng" algn="ctr">
+                      <a:solidFill>
+                        <a:srgbClr val="E4DDCB"/>
+                      </a:solidFill>
+                      <a:prstDash val="solid"/>
+                      <a:round/>
+                      <a:headEnd type="none" w="med" len="med"/>
+                      <a:tailEnd type="none" w="med" len="med"/>
+                    </a:lnR>
+                    <a:lnT w="9525" cap="flat" cmpd="sng" algn="ctr">
+                      <a:solidFill>
+                        <a:srgbClr val="E4DDCB"/>
+                      </a:solidFill>
+                      <a:prstDash val="solid"/>
+                      <a:round/>
+                      <a:headEnd type="none" w="med" len="med"/>
+                      <a:tailEnd type="none" w="med" len="med"/>
+                    </a:lnT>
+                    <a:lnB w="9525" cap="flat" cmpd="sng" algn="ctr">
+                      <a:solidFill>
+                        <a:srgbClr val="E4DDCB"/>
+                      </a:solidFill>
+                      <a:prstDash val="solid"/>
+                      <a:round/>
+                      <a:headEnd type="none" w="med" len="med"/>
+                      <a:tailEnd type="none" w="med" len="med"/>
+                    </a:lnB>
+                  </a:tcPr>
+                </a:tc>
+                <a:tc>
+                  <a:txBody>
+                    <a:bodyPr/>
+                    <a:lstStyle/>
+                    <a:p>
+                      <a:pPr algn="ctr" indent="0" marL="0">
+                        <a:buNone/>
+                      </a:pPr>
+                      <a:r>
+                        <a:rPr lang="en-US" sz="1150" b="1" dirty="0">
+                          <a:solidFill>
+                            <a:srgbClr val="5E7B47"/>
+                          </a:solidFill>
+                          <a:latin typeface="Arial" pitchFamily="34" charset="0"/>
+                          <a:ea typeface="Arial" pitchFamily="34" charset="-122"/>
+                          <a:cs typeface="Arial" pitchFamily="34" charset="-120"/>
+                        </a:rPr>
+                        <a:t>פנימי</a:t>
+                      </a:r>
+                      <a:endParaRPr lang="en-US" sz="1150" dirty="0">
+                        <a:latin typeface="Arial" charset="0"/>
+                        <a:ea typeface="Arial" charset="0"/>
+                        <a:cs typeface="Arial" charset="0"/>
+                      </a:endParaRPr>
+                    </a:p>
+                  </a:txBody>
+                  <a:tcPr marL="73152" marR="73152" marT="27432" marB="27432" anchor="ctr">
+                    <a:lnL w="9525" cap="flat" cmpd="sng" algn="ctr">
+                      <a:solidFill>
+                        <a:srgbClr val="E4DDCB"/>
+                      </a:solidFill>
+                      <a:prstDash val="solid"/>
+                      <a:round/>
+                      <a:headEnd type="none" w="med" len="med"/>
+                      <a:tailEnd type="none" w="med" len="med"/>
+                    </a:lnL>
+                    <a:lnR w="9525" cap="flat" cmpd="sng" algn="ctr">
+                      <a:solidFill>
+                        <a:srgbClr val="E4DDCB"/>
+                      </a:solidFill>
+                      <a:prstDash val="solid"/>
+                      <a:round/>
+                      <a:headEnd type="none" w="med" len="med"/>
+                      <a:tailEnd type="none" w="med" len="med"/>
+                    </a:lnR>
+                    <a:lnT w="9525" cap="flat" cmpd="sng" algn="ctr">
+                      <a:solidFill>
+                        <a:srgbClr val="E4DDCB"/>
+                      </a:solidFill>
+                      <a:prstDash val="solid"/>
+                      <a:round/>
+                      <a:headEnd type="none" w="med" len="med"/>
+                      <a:tailEnd type="none" w="med" len="med"/>
+                    </a:lnT>
+                    <a:lnB w="9525" cap="flat" cmpd="sng" algn="ctr">
+                      <a:solidFill>
+                        <a:srgbClr val="E4DDCB"/>
+                      </a:solidFill>
+                      <a:prstDash val="solid"/>
+                      <a:round/>
+                      <a:headEnd type="none" w="med" len="med"/>
+                      <a:tailEnd type="none" w="med" len="med"/>
+                    </a:lnB>
+                  </a:tcPr>
+                </a:tc>
+                <a:tc>
+                  <a:txBody>
+                    <a:bodyPr/>
+                    <a:lstStyle/>
+                    <a:p>
+                      <a:pPr algn="ctr" indent="0" marL="0">
+                        <a:buNone/>
+                      </a:pPr>
+                      <a:r>
+                        <a:rPr lang="en-US" sz="1150" b="1" dirty="0">
+                          <a:solidFill>
+                            <a:srgbClr val="6E6250"/>
+                          </a:solidFill>
+                          <a:latin typeface="Arial" pitchFamily="34" charset="0"/>
+                          <a:ea typeface="Arial" pitchFamily="34" charset="-122"/>
+                          <a:cs typeface="Arial" pitchFamily="34" charset="-120"/>
+                        </a:rPr>
+                        <a:t>02</a:t>
                       </a:r>
                       <a:endParaRPr lang="en-US" sz="1150" dirty="0">
                         <a:latin typeface="Arial" charset="0"/>
@@ -12692,7 +14401,7 @@
                           <a:ea typeface="Arial" pitchFamily="34" charset="-122"/>
                           <a:cs typeface="Arial" pitchFamily="34" charset="-120"/>
                         </a:rPr>
-                        <a:t>חניך 2 + חניך 5</a:t>
+                        <a:t>חניך 2 + חניך 3</a:t>
                       </a:r>
                       <a:endParaRPr lang="en-US" sz="1150" dirty="0">
                         <a:latin typeface="Arial" charset="0"/>
@@ -12757,7 +14466,7 @@
                           <a:ea typeface="Arial" pitchFamily="34" charset="-122"/>
                           <a:cs typeface="Arial" pitchFamily="34" charset="-120"/>
                         </a:rPr>
-                        <a:t>ו׳ תשרי תשפ״ז</a:t>
+                        <a:t>י״ג תשרי תשפ״ז</a:t>
                       </a:r>
                       <a:endParaRPr lang="en-US" sz="1150" dirty="0">
                         <a:latin typeface="Arial" charset="0"/>
@@ -12822,7 +14531,7 @@
                           <a:ea typeface="Arial" pitchFamily="34" charset="-122"/>
                           <a:cs typeface="Arial" pitchFamily="34" charset="-120"/>
                         </a:rPr>
-                        <a:t>17.9.2026</a:t>
+                        <a:t>24.9.2026</a:t>
                       </a:r>
                       <a:endParaRPr lang="en-US" sz="1150" dirty="0">
                         <a:latin typeface="Arial" charset="0"/>
@@ -12881,13 +14590,13 @@
                       <a:r>
                         <a:rPr lang="en-US" sz="1150" b="1" dirty="0">
                           <a:solidFill>
-                            <a:srgbClr val="5E7B47"/>
+                            <a:srgbClr val="3F6480"/>
                           </a:solidFill>
                           <a:latin typeface="Arial" pitchFamily="34" charset="0"/>
                           <a:ea typeface="Arial" pitchFamily="34" charset="-122"/>
                           <a:cs typeface="Arial" pitchFamily="34" charset="-120"/>
                         </a:rPr>
-                        <a:t>פנימי</a:t>
+                        <a:t>חיצוני</a:t>
                       </a:r>
                       <a:endParaRPr lang="en-US" sz="1150" dirty="0">
                         <a:latin typeface="Arial" charset="0"/>
@@ -12952,7 +14661,7 @@
                           <a:ea typeface="Arial" pitchFamily="34" charset="-122"/>
                           <a:cs typeface="Arial" pitchFamily="34" charset="-120"/>
                         </a:rPr>
-                        <a:t>02</a:t>
+                        <a:t>03</a:t>
                       </a:r>
                       <a:endParaRPr lang="en-US" sz="1150" dirty="0">
                         <a:latin typeface="Arial" charset="0"/>
@@ -13084,7 +14793,7 @@
                           <a:ea typeface="Arial" pitchFamily="34" charset="-122"/>
                           <a:cs typeface="Arial" pitchFamily="34" charset="-120"/>
                         </a:rPr>
-                        <a:t>חניך 3 + חניך 4</a:t>
+                        <a:t>חניך 9 + חניך 5</a:t>
                       </a:r>
                       <a:endParaRPr lang="en-US" sz="1150" dirty="0">
                         <a:latin typeface="Arial" charset="0"/>
@@ -13149,7 +14858,7 @@
                           <a:ea typeface="Arial" pitchFamily="34" charset="-122"/>
                           <a:cs typeface="Arial" pitchFamily="34" charset="-120"/>
                         </a:rPr>
-                        <a:t>י״ג תשרי תשפ״ז</a:t>
+                        <a:t>כ״ז תשרי תשפ״ז</a:t>
                       </a:r>
                       <a:endParaRPr lang="en-US" sz="1150" dirty="0">
                         <a:latin typeface="Arial" charset="0"/>
@@ -13214,7 +14923,7 @@
                           <a:ea typeface="Arial" pitchFamily="34" charset="-122"/>
                           <a:cs typeface="Arial" pitchFamily="34" charset="-120"/>
                         </a:rPr>
-                        <a:t>24.9.2026</a:t>
+                        <a:t>8.10.2026</a:t>
                       </a:r>
                       <a:endParaRPr lang="en-US" sz="1150" dirty="0">
                         <a:latin typeface="Arial" charset="0"/>
@@ -13273,13 +14982,13 @@
                       <a:r>
                         <a:rPr lang="en-US" sz="1150" b="1" dirty="0">
                           <a:solidFill>
-                            <a:srgbClr val="3F6480"/>
+                            <a:srgbClr val="5E7B47"/>
                           </a:solidFill>
                           <a:latin typeface="Arial" pitchFamily="34" charset="0"/>
                           <a:ea typeface="Arial" pitchFamily="34" charset="-122"/>
                           <a:cs typeface="Arial" pitchFamily="34" charset="-120"/>
                         </a:rPr>
-                        <a:t>חיצוני</a:t>
+                        <a:t>פנימי</a:t>
                       </a:r>
                       <a:endParaRPr lang="en-US" sz="1150" dirty="0">
                         <a:latin typeface="Arial" charset="0"/>
@@ -13344,7 +15053,7 @@
                           <a:ea typeface="Arial" pitchFamily="34" charset="-122"/>
                           <a:cs typeface="Arial" pitchFamily="34" charset="-120"/>
                         </a:rPr>
-                        <a:t>03</a:t>
+                        <a:t>04</a:t>
                       </a:r>
                       <a:endParaRPr lang="en-US" sz="1150" dirty="0">
                         <a:latin typeface="Arial" charset="0"/>
@@ -13476,7 +15185,7 @@
                           <a:ea typeface="Arial" pitchFamily="34" charset="-122"/>
                           <a:cs typeface="Arial" pitchFamily="34" charset="-120"/>
                         </a:rPr>
-                        <a:t>חניך 9 + חניך 7</a:t>
+                        <a:t>חניך 1 + חניך 7</a:t>
                       </a:r>
                       <a:endParaRPr lang="en-US" sz="1150" dirty="0">
                         <a:latin typeface="Arial" charset="0"/>
@@ -13541,7 +15250,7 @@
                           <a:ea typeface="Arial" pitchFamily="34" charset="-122"/>
                           <a:cs typeface="Arial" pitchFamily="34" charset="-120"/>
                         </a:rPr>
-                        <a:t>כ״ז תשרי תשפ״ז</a:t>
+                        <a:t>ד׳ חשון תשפ״ז</a:t>
                       </a:r>
                       <a:endParaRPr lang="en-US" sz="1150" dirty="0">
                         <a:latin typeface="Arial" charset="0"/>
@@ -13606,7 +15315,7 @@
                           <a:ea typeface="Arial" pitchFamily="34" charset="-122"/>
                           <a:cs typeface="Arial" pitchFamily="34" charset="-120"/>
                         </a:rPr>
-                        <a:t>8.10.2026</a:t>
+                        <a:t>15.10.2026</a:t>
                       </a:r>
                       <a:endParaRPr lang="en-US" sz="1150" dirty="0">
                         <a:latin typeface="Arial" charset="0"/>
@@ -13665,13 +15374,13 @@
                       <a:r>
                         <a:rPr lang="en-US" sz="1150" b="1" dirty="0">
                           <a:solidFill>
-                            <a:srgbClr val="5E7B47"/>
+                            <a:srgbClr val="3F6480"/>
                           </a:solidFill>
                           <a:latin typeface="Arial" pitchFamily="34" charset="0"/>
                           <a:ea typeface="Arial" pitchFamily="34" charset="-122"/>
                           <a:cs typeface="Arial" pitchFamily="34" charset="-120"/>
                         </a:rPr>
-                        <a:t>פנימי</a:t>
+                        <a:t>חיצוני</a:t>
                       </a:r>
                       <a:endParaRPr lang="en-US" sz="1150" dirty="0">
                         <a:latin typeface="Arial" charset="0"/>
@@ -13736,7 +15445,7 @@
                           <a:ea typeface="Arial" pitchFamily="34" charset="-122"/>
                           <a:cs typeface="Arial" pitchFamily="34" charset="-120"/>
                         </a:rPr>
-                        <a:t>04</a:t>
+                        <a:t>05</a:t>
                       </a:r>
                       <a:endParaRPr lang="en-US" sz="1150" dirty="0">
                         <a:latin typeface="Arial" charset="0"/>
@@ -13868,7 +15577,7 @@
                           <a:ea typeface="Arial" pitchFamily="34" charset="-122"/>
                           <a:cs typeface="Arial" pitchFamily="34" charset="-120"/>
                         </a:rPr>
-                        <a:t>חניך 1 + חניך 8</a:t>
+                        <a:t>חניך 10 + חניך 4</a:t>
                       </a:r>
                       <a:endParaRPr lang="en-US" sz="1150" dirty="0">
                         <a:latin typeface="Arial" charset="0"/>
@@ -13933,7 +15642,7 @@
                           <a:ea typeface="Arial" pitchFamily="34" charset="-122"/>
                           <a:cs typeface="Arial" pitchFamily="34" charset="-120"/>
                         </a:rPr>
-                        <a:t>ד׳ חשון תשפ״ז</a:t>
+                        <a:t>י״א חשון תשפ״ז</a:t>
                       </a:r>
                       <a:endParaRPr lang="en-US" sz="1150" dirty="0">
                         <a:latin typeface="Arial" charset="0"/>
@@ -13998,7 +15707,7 @@
                           <a:ea typeface="Arial" pitchFamily="34" charset="-122"/>
                           <a:cs typeface="Arial" pitchFamily="34" charset="-120"/>
                         </a:rPr>
-                        <a:t>15.10.2026</a:t>
+                        <a:t>22.10.2026</a:t>
                       </a:r>
                       <a:endParaRPr lang="en-US" sz="1150" dirty="0">
                         <a:latin typeface="Arial" charset="0"/>
@@ -14057,13 +15766,13 @@
                       <a:r>
                         <a:rPr lang="en-US" sz="1150" b="1" dirty="0">
                           <a:solidFill>
-                            <a:srgbClr val="3F6480"/>
+                            <a:srgbClr val="5E7B47"/>
                           </a:solidFill>
                           <a:latin typeface="Arial" pitchFamily="34" charset="0"/>
                           <a:ea typeface="Arial" pitchFamily="34" charset="-122"/>
                           <a:cs typeface="Arial" pitchFamily="34" charset="-120"/>
                         </a:rPr>
-                        <a:t>חיצוני</a:t>
+                        <a:t>פנימי</a:t>
                       </a:r>
                       <a:endParaRPr lang="en-US" sz="1150" dirty="0">
                         <a:latin typeface="Arial" charset="0"/>
@@ -14128,7 +15837,7 @@
                           <a:ea typeface="Arial" pitchFamily="34" charset="-122"/>
                           <a:cs typeface="Arial" pitchFamily="34" charset="-120"/>
                         </a:rPr>
-                        <a:t>05</a:t>
+                        <a:t>06</a:t>
                       </a:r>
                       <a:endParaRPr lang="en-US" sz="1150" dirty="0">
                         <a:latin typeface="Arial" charset="0"/>
@@ -14260,7 +15969,7 @@
                           <a:ea typeface="Arial" pitchFamily="34" charset="-122"/>
                           <a:cs typeface="Arial" pitchFamily="34" charset="-120"/>
                         </a:rPr>
-                        <a:t>חניך 6 + חניך 2</a:t>
+                        <a:t>חניך 8 + חניך 6</a:t>
                       </a:r>
                       <a:endParaRPr lang="en-US" sz="1150" dirty="0">
                         <a:latin typeface="Arial" charset="0"/>
@@ -14325,7 +16034,7 @@
                           <a:ea typeface="Arial" pitchFamily="34" charset="-122"/>
                           <a:cs typeface="Arial" pitchFamily="34" charset="-120"/>
                         </a:rPr>
-                        <a:t>י״א חשון תשפ״ז</a:t>
+                        <a:t>י״ח חשון תשפ״ז</a:t>
                       </a:r>
                       <a:endParaRPr lang="en-US" sz="1150" dirty="0">
                         <a:latin typeface="Arial" charset="0"/>
@@ -14390,7 +16099,7 @@
                           <a:ea typeface="Arial" pitchFamily="34" charset="-122"/>
                           <a:cs typeface="Arial" pitchFamily="34" charset="-120"/>
                         </a:rPr>
-                        <a:t>22.10.2026</a:t>
+                        <a:t>29.10.2026</a:t>
                       </a:r>
                       <a:endParaRPr lang="en-US" sz="1150" dirty="0">
                         <a:latin typeface="Arial" charset="0"/>
@@ -14449,13 +16158,13 @@
                       <a:r>
                         <a:rPr lang="en-US" sz="1150" b="1" dirty="0">
                           <a:solidFill>
-                            <a:srgbClr val="5E7B47"/>
+                            <a:srgbClr val="3F6480"/>
                           </a:solidFill>
                           <a:latin typeface="Arial" pitchFamily="34" charset="0"/>
                           <a:ea typeface="Arial" pitchFamily="34" charset="-122"/>
                           <a:cs typeface="Arial" pitchFamily="34" charset="-120"/>
                         </a:rPr>
-                        <a:t>פנימי</a:t>
+                        <a:t>חיצוני</a:t>
                       </a:r>
                       <a:endParaRPr lang="en-US" sz="1150" dirty="0">
                         <a:latin typeface="Arial" charset="0"/>
@@ -14520,7 +16229,7 @@
                           <a:ea typeface="Arial" pitchFamily="34" charset="-122"/>
                           <a:cs typeface="Arial" pitchFamily="34" charset="-120"/>
                         </a:rPr>
-                        <a:t>06</a:t>
+                        <a:t>07</a:t>
                       </a:r>
                       <a:endParaRPr lang="en-US" sz="1150" dirty="0">
                         <a:latin typeface="Arial" charset="0"/>
@@ -14652,7 +16361,7 @@
                           <a:ea typeface="Arial" pitchFamily="34" charset="-122"/>
                           <a:cs typeface="Arial" pitchFamily="34" charset="-120"/>
                         </a:rPr>
-                        <a:t>חניך 7 + חניך 10</a:t>
+                        <a:t>חניך 9 + חניך 3</a:t>
                       </a:r>
                       <a:endParaRPr lang="en-US" sz="1150" dirty="0">
                         <a:latin typeface="Arial" charset="0"/>
@@ -14717,7 +16426,7 @@
                           <a:ea typeface="Arial" pitchFamily="34" charset="-122"/>
                           <a:cs typeface="Arial" pitchFamily="34" charset="-120"/>
                         </a:rPr>
-                        <a:t>י״ח חשון תשפ״ז</a:t>
+                        <a:t>כ״ה חשון תשפ״ז</a:t>
                       </a:r>
                       <a:endParaRPr lang="en-US" sz="1150" dirty="0">
                         <a:latin typeface="Arial" charset="0"/>
@@ -14782,7 +16491,7 @@
                           <a:ea typeface="Arial" pitchFamily="34" charset="-122"/>
                           <a:cs typeface="Arial" pitchFamily="34" charset="-120"/>
                         </a:rPr>
-                        <a:t>29.10.2026</a:t>
+                        <a:t>5.11.2026</a:t>
                       </a:r>
                       <a:endParaRPr lang="en-US" sz="1150" dirty="0">
                         <a:latin typeface="Arial" charset="0"/>
@@ -14841,13 +16550,13 @@
                       <a:r>
                         <a:rPr lang="en-US" sz="1150" b="1" dirty="0">
                           <a:solidFill>
-                            <a:srgbClr val="3F6480"/>
+                            <a:srgbClr val="5E7B47"/>
                           </a:solidFill>
                           <a:latin typeface="Arial" pitchFamily="34" charset="0"/>
                           <a:ea typeface="Arial" pitchFamily="34" charset="-122"/>
                           <a:cs typeface="Arial" pitchFamily="34" charset="-120"/>
                         </a:rPr>
-                        <a:t>חיצוני</a:t>
+                        <a:t>פנימי</a:t>
                       </a:r>
                       <a:endParaRPr lang="en-US" sz="1150" dirty="0">
                         <a:latin typeface="Arial" charset="0"/>
@@ -14912,7 +16621,7 @@
                           <a:ea typeface="Arial" pitchFamily="34" charset="-122"/>
                           <a:cs typeface="Arial" pitchFamily="34" charset="-120"/>
                         </a:rPr>
-                        <a:t>07</a:t>
+                        <a:t>08</a:t>
                       </a:r>
                       <a:endParaRPr lang="en-US" sz="1150" dirty="0">
                         <a:latin typeface="Arial" charset="0"/>
@@ -15044,7 +16753,7 @@
                           <a:ea typeface="Arial" pitchFamily="34" charset="-122"/>
                           <a:cs typeface="Arial" pitchFamily="34" charset="-120"/>
                         </a:rPr>
-                        <a:t>חניך 1 + חניך 4</a:t>
+                        <a:t>חניך 10 + חניך 2</a:t>
                       </a:r>
                       <a:endParaRPr lang="en-US" sz="1150" dirty="0">
                         <a:latin typeface="Arial" charset="0"/>
@@ -15109,7 +16818,7 @@
                           <a:ea typeface="Arial" pitchFamily="34" charset="-122"/>
                           <a:cs typeface="Arial" pitchFamily="34" charset="-120"/>
                         </a:rPr>
-                        <a:t>כ״ה חשון תשפ״ז</a:t>
+                        <a:t>ב׳ כסלו תשפ״ז</a:t>
                       </a:r>
                       <a:endParaRPr lang="en-US" sz="1150" dirty="0">
                         <a:latin typeface="Arial" charset="0"/>
@@ -15174,7 +16883,7 @@
                           <a:ea typeface="Arial" pitchFamily="34" charset="-122"/>
                           <a:cs typeface="Arial" pitchFamily="34" charset="-120"/>
                         </a:rPr>
-                        <a:t>5.11.2026</a:t>
+                        <a:t>12.11.2026</a:t>
                       </a:r>
                       <a:endParaRPr lang="en-US" sz="1150" dirty="0">
                         <a:latin typeface="Arial" charset="0"/>
@@ -15233,13 +16942,13 @@
                       <a:r>
                         <a:rPr lang="en-US" sz="1150" b="1" dirty="0">
                           <a:solidFill>
-                            <a:srgbClr val="5E7B47"/>
+                            <a:srgbClr val="3F6480"/>
                           </a:solidFill>
                           <a:latin typeface="Arial" pitchFamily="34" charset="0"/>
                           <a:ea typeface="Arial" pitchFamily="34" charset="-122"/>
                           <a:cs typeface="Arial" pitchFamily="34" charset="-120"/>
                         </a:rPr>
-                        <a:t>פנימי</a:t>
+                        <a:t>חיצוני</a:t>
                       </a:r>
                       <a:endParaRPr lang="en-US" sz="1150" dirty="0">
                         <a:latin typeface="Arial" charset="0"/>
@@ -15304,7 +17013,7 @@
                           <a:ea typeface="Arial" pitchFamily="34" charset="-122"/>
                           <a:cs typeface="Arial" pitchFamily="34" charset="-120"/>
                         </a:rPr>
-                        <a:t>08</a:t>
+                        <a:t>09</a:t>
                       </a:r>
                       <a:endParaRPr lang="en-US" sz="1150" dirty="0">
                         <a:latin typeface="Arial" charset="0"/>
@@ -15436,399 +17145,7 @@
                           <a:ea typeface="Arial" pitchFamily="34" charset="-122"/>
                           <a:cs typeface="Arial" pitchFamily="34" charset="-120"/>
                         </a:rPr>
-                        <a:t>חניך 5 + חניך 3</a:t>
-                      </a:r>
-                      <a:endParaRPr lang="en-US" sz="1150" dirty="0">
-                        <a:latin typeface="Arial" charset="0"/>
-                        <a:ea typeface="Arial" charset="0"/>
-                        <a:cs typeface="Arial" charset="0"/>
-                      </a:endParaRPr>
-                    </a:p>
-                  </a:txBody>
-                  <a:tcPr marL="73152" marR="73152" marT="27432" marB="27432" anchor="ctr">
-                    <a:lnL w="9525" cap="flat" cmpd="sng" algn="ctr">
-                      <a:solidFill>
-                        <a:srgbClr val="E4DDCB"/>
-                      </a:solidFill>
-                      <a:prstDash val="solid"/>
-                      <a:round/>
-                      <a:headEnd type="none" w="med" len="med"/>
-                      <a:tailEnd type="none" w="med" len="med"/>
-                    </a:lnL>
-                    <a:lnR w="9525" cap="flat" cmpd="sng" algn="ctr">
-                      <a:solidFill>
-                        <a:srgbClr val="E4DDCB"/>
-                      </a:solidFill>
-                      <a:prstDash val="solid"/>
-                      <a:round/>
-                      <a:headEnd type="none" w="med" len="med"/>
-                      <a:tailEnd type="none" w="med" len="med"/>
-                    </a:lnR>
-                    <a:lnT w="9525" cap="flat" cmpd="sng" algn="ctr">
-                      <a:solidFill>
-                        <a:srgbClr val="E4DDCB"/>
-                      </a:solidFill>
-                      <a:prstDash val="solid"/>
-                      <a:round/>
-                      <a:headEnd type="none" w="med" len="med"/>
-                      <a:tailEnd type="none" w="med" len="med"/>
-                    </a:lnT>
-                    <a:lnB w="9525" cap="flat" cmpd="sng" algn="ctr">
-                      <a:solidFill>
-                        <a:srgbClr val="E4DDCB"/>
-                      </a:solidFill>
-                      <a:prstDash val="solid"/>
-                      <a:round/>
-                      <a:headEnd type="none" w="med" len="med"/>
-                      <a:tailEnd type="none" w="med" len="med"/>
-                    </a:lnB>
-                  </a:tcPr>
-                </a:tc>
-                <a:tc>
-                  <a:txBody>
-                    <a:bodyPr/>
-                    <a:lstStyle/>
-                    <a:p>
-                      <a:pPr algn="r" indent="0" marL="0">
-                        <a:buNone/>
-                      </a:pPr>
-                      <a:r>
-                        <a:rPr lang="en-US" sz="1150" dirty="0">
-                          <a:solidFill>
-                            <a:srgbClr val="3E3426"/>
-                          </a:solidFill>
-                          <a:latin typeface="Arial" pitchFamily="34" charset="0"/>
-                          <a:ea typeface="Arial" pitchFamily="34" charset="-122"/>
-                          <a:cs typeface="Arial" pitchFamily="34" charset="-120"/>
-                        </a:rPr>
-                        <a:t>ב׳ כסלו תשפ״ז</a:t>
-                      </a:r>
-                      <a:endParaRPr lang="en-US" sz="1150" dirty="0">
-                        <a:latin typeface="Arial" charset="0"/>
-                        <a:ea typeface="Arial" charset="0"/>
-                        <a:cs typeface="Arial" charset="0"/>
-                      </a:endParaRPr>
-                    </a:p>
-                  </a:txBody>
-                  <a:tcPr marL="73152" marR="73152" marT="27432" marB="27432" anchor="ctr">
-                    <a:lnL w="9525" cap="flat" cmpd="sng" algn="ctr">
-                      <a:solidFill>
-                        <a:srgbClr val="E4DDCB"/>
-                      </a:solidFill>
-                      <a:prstDash val="solid"/>
-                      <a:round/>
-                      <a:headEnd type="none" w="med" len="med"/>
-                      <a:tailEnd type="none" w="med" len="med"/>
-                    </a:lnL>
-                    <a:lnR w="9525" cap="flat" cmpd="sng" algn="ctr">
-                      <a:solidFill>
-                        <a:srgbClr val="E4DDCB"/>
-                      </a:solidFill>
-                      <a:prstDash val="solid"/>
-                      <a:round/>
-                      <a:headEnd type="none" w="med" len="med"/>
-                      <a:tailEnd type="none" w="med" len="med"/>
-                    </a:lnR>
-                    <a:lnT w="9525" cap="flat" cmpd="sng" algn="ctr">
-                      <a:solidFill>
-                        <a:srgbClr val="E4DDCB"/>
-                      </a:solidFill>
-                      <a:prstDash val="solid"/>
-                      <a:round/>
-                      <a:headEnd type="none" w="med" len="med"/>
-                      <a:tailEnd type="none" w="med" len="med"/>
-                    </a:lnT>
-                    <a:lnB w="9525" cap="flat" cmpd="sng" algn="ctr">
-                      <a:solidFill>
-                        <a:srgbClr val="E4DDCB"/>
-                      </a:solidFill>
-                      <a:prstDash val="solid"/>
-                      <a:round/>
-                      <a:headEnd type="none" w="med" len="med"/>
-                      <a:tailEnd type="none" w="med" len="med"/>
-                    </a:lnB>
-                  </a:tcPr>
-                </a:tc>
-                <a:tc>
-                  <a:txBody>
-                    <a:bodyPr/>
-                    <a:lstStyle/>
-                    <a:p>
-                      <a:pPr algn="ctr" indent="0" marL="0">
-                        <a:buNone/>
-                      </a:pPr>
-                      <a:r>
-                        <a:rPr lang="en-US" sz="1150" dirty="0">
-                          <a:solidFill>
-                            <a:srgbClr val="3E3426"/>
-                          </a:solidFill>
-                          <a:latin typeface="Arial" pitchFamily="34" charset="0"/>
-                          <a:ea typeface="Arial" pitchFamily="34" charset="-122"/>
-                          <a:cs typeface="Arial" pitchFamily="34" charset="-120"/>
-                        </a:rPr>
-                        <a:t>12.11.2026</a:t>
-                      </a:r>
-                      <a:endParaRPr lang="en-US" sz="1150" dirty="0">
-                        <a:latin typeface="Arial" charset="0"/>
-                        <a:ea typeface="Arial" charset="0"/>
-                        <a:cs typeface="Arial" charset="0"/>
-                      </a:endParaRPr>
-                    </a:p>
-                  </a:txBody>
-                  <a:tcPr marL="73152" marR="73152" marT="27432" marB="27432" anchor="ctr">
-                    <a:lnL w="9525" cap="flat" cmpd="sng" algn="ctr">
-                      <a:solidFill>
-                        <a:srgbClr val="E4DDCB"/>
-                      </a:solidFill>
-                      <a:prstDash val="solid"/>
-                      <a:round/>
-                      <a:headEnd type="none" w="med" len="med"/>
-                      <a:tailEnd type="none" w="med" len="med"/>
-                    </a:lnL>
-                    <a:lnR w="9525" cap="flat" cmpd="sng" algn="ctr">
-                      <a:solidFill>
-                        <a:srgbClr val="E4DDCB"/>
-                      </a:solidFill>
-                      <a:prstDash val="solid"/>
-                      <a:round/>
-                      <a:headEnd type="none" w="med" len="med"/>
-                      <a:tailEnd type="none" w="med" len="med"/>
-                    </a:lnR>
-                    <a:lnT w="9525" cap="flat" cmpd="sng" algn="ctr">
-                      <a:solidFill>
-                        <a:srgbClr val="E4DDCB"/>
-                      </a:solidFill>
-                      <a:prstDash val="solid"/>
-                      <a:round/>
-                      <a:headEnd type="none" w="med" len="med"/>
-                      <a:tailEnd type="none" w="med" len="med"/>
-                    </a:lnT>
-                    <a:lnB w="9525" cap="flat" cmpd="sng" algn="ctr">
-                      <a:solidFill>
-                        <a:srgbClr val="E4DDCB"/>
-                      </a:solidFill>
-                      <a:prstDash val="solid"/>
-                      <a:round/>
-                      <a:headEnd type="none" w="med" len="med"/>
-                      <a:tailEnd type="none" w="med" len="med"/>
-                    </a:lnB>
-                  </a:tcPr>
-                </a:tc>
-                <a:tc>
-                  <a:txBody>
-                    <a:bodyPr/>
-                    <a:lstStyle/>
-                    <a:p>
-                      <a:pPr algn="ctr" indent="0" marL="0">
-                        <a:buNone/>
-                      </a:pPr>
-                      <a:r>
-                        <a:rPr lang="en-US" sz="1150" b="1" dirty="0">
-                          <a:solidFill>
-                            <a:srgbClr val="3F6480"/>
-                          </a:solidFill>
-                          <a:latin typeface="Arial" pitchFamily="34" charset="0"/>
-                          <a:ea typeface="Arial" pitchFamily="34" charset="-122"/>
-                          <a:cs typeface="Arial" pitchFamily="34" charset="-120"/>
-                        </a:rPr>
-                        <a:t>חיצוני</a:t>
-                      </a:r>
-                      <a:endParaRPr lang="en-US" sz="1150" dirty="0">
-                        <a:latin typeface="Arial" charset="0"/>
-                        <a:ea typeface="Arial" charset="0"/>
-                        <a:cs typeface="Arial" charset="0"/>
-                      </a:endParaRPr>
-                    </a:p>
-                  </a:txBody>
-                  <a:tcPr marL="73152" marR="73152" marT="27432" marB="27432" anchor="ctr">
-                    <a:lnL w="9525" cap="flat" cmpd="sng" algn="ctr">
-                      <a:solidFill>
-                        <a:srgbClr val="E4DDCB"/>
-                      </a:solidFill>
-                      <a:prstDash val="solid"/>
-                      <a:round/>
-                      <a:headEnd type="none" w="med" len="med"/>
-                      <a:tailEnd type="none" w="med" len="med"/>
-                    </a:lnL>
-                    <a:lnR w="9525" cap="flat" cmpd="sng" algn="ctr">
-                      <a:solidFill>
-                        <a:srgbClr val="E4DDCB"/>
-                      </a:solidFill>
-                      <a:prstDash val="solid"/>
-                      <a:round/>
-                      <a:headEnd type="none" w="med" len="med"/>
-                      <a:tailEnd type="none" w="med" len="med"/>
-                    </a:lnR>
-                    <a:lnT w="9525" cap="flat" cmpd="sng" algn="ctr">
-                      <a:solidFill>
-                        <a:srgbClr val="E4DDCB"/>
-                      </a:solidFill>
-                      <a:prstDash val="solid"/>
-                      <a:round/>
-                      <a:headEnd type="none" w="med" len="med"/>
-                      <a:tailEnd type="none" w="med" len="med"/>
-                    </a:lnT>
-                    <a:lnB w="9525" cap="flat" cmpd="sng" algn="ctr">
-                      <a:solidFill>
-                        <a:srgbClr val="E4DDCB"/>
-                      </a:solidFill>
-                      <a:prstDash val="solid"/>
-                      <a:round/>
-                      <a:headEnd type="none" w="med" len="med"/>
-                      <a:tailEnd type="none" w="med" len="med"/>
-                    </a:lnB>
-                  </a:tcPr>
-                </a:tc>
-                <a:tc>
-                  <a:txBody>
-                    <a:bodyPr/>
-                    <a:lstStyle/>
-                    <a:p>
-                      <a:pPr algn="ctr" indent="0" marL="0">
-                        <a:buNone/>
-                      </a:pPr>
-                      <a:r>
-                        <a:rPr lang="en-US" sz="1150" b="1" dirty="0">
-                          <a:solidFill>
-                            <a:srgbClr val="6E6250"/>
-                          </a:solidFill>
-                          <a:latin typeface="Arial" pitchFamily="34" charset="0"/>
-                          <a:ea typeface="Arial" pitchFamily="34" charset="-122"/>
-                          <a:cs typeface="Arial" pitchFamily="34" charset="-120"/>
-                        </a:rPr>
-                        <a:t>09</a:t>
-                      </a:r>
-                      <a:endParaRPr lang="en-US" sz="1150" dirty="0">
-                        <a:latin typeface="Arial" charset="0"/>
-                        <a:ea typeface="Arial" charset="0"/>
-                        <a:cs typeface="Arial" charset="0"/>
-                      </a:endParaRPr>
-                    </a:p>
-                  </a:txBody>
-                  <a:tcPr marL="73152" marR="73152" marT="27432" marB="27432" anchor="ctr">
-                    <a:lnL w="9525" cap="flat" cmpd="sng" algn="ctr">
-                      <a:solidFill>
-                        <a:srgbClr val="E4DDCB"/>
-                      </a:solidFill>
-                      <a:prstDash val="solid"/>
-                      <a:round/>
-                      <a:headEnd type="none" w="med" len="med"/>
-                      <a:tailEnd type="none" w="med" len="med"/>
-                    </a:lnL>
-                    <a:lnR w="9525" cap="flat" cmpd="sng" algn="ctr">
-                      <a:solidFill>
-                        <a:srgbClr val="E4DDCB"/>
-                      </a:solidFill>
-                      <a:prstDash val="solid"/>
-                      <a:round/>
-                      <a:headEnd type="none" w="med" len="med"/>
-                      <a:tailEnd type="none" w="med" len="med"/>
-                    </a:lnR>
-                    <a:lnT w="9525" cap="flat" cmpd="sng" algn="ctr">
-                      <a:solidFill>
-                        <a:srgbClr val="E4DDCB"/>
-                      </a:solidFill>
-                      <a:prstDash val="solid"/>
-                      <a:round/>
-                      <a:headEnd type="none" w="med" len="med"/>
-                      <a:tailEnd type="none" w="med" len="med"/>
-                    </a:lnT>
-                    <a:lnB w="9525" cap="flat" cmpd="sng" algn="ctr">
-                      <a:solidFill>
-                        <a:srgbClr val="E4DDCB"/>
-                      </a:solidFill>
-                      <a:prstDash val="solid"/>
-                      <a:round/>
-                      <a:headEnd type="none" w="med" len="med"/>
-                      <a:tailEnd type="none" w="med" len="med"/>
-                    </a:lnB>
-                  </a:tcPr>
-                </a:tc>
-              </a:tr>
-              <a:tr h="392430">
-                <a:tc>
-                  <a:txBody>
-                    <a:bodyPr/>
-                    <a:lstStyle/>
-                    <a:p>
-                      <a:pPr algn="r" indent="0" marL="0">
-                        <a:buNone/>
-                      </a:pPr>
-                      <a:r>
-                        <a:rPr lang="en-US" sz="1150" dirty="0">
-                          <a:solidFill>
-                            <a:srgbClr val="6E6250"/>
-                          </a:solidFill>
-                          <a:latin typeface="Arial" pitchFamily="34" charset="0"/>
-                          <a:ea typeface="Arial" pitchFamily="34" charset="-122"/>
-                          <a:cs typeface="Arial" pitchFamily="34" charset="-120"/>
-                        </a:rPr>
-                        <a:t>—</a:t>
-                      </a:r>
-                      <a:endParaRPr lang="en-US" sz="1150" dirty="0">
-                        <a:latin typeface="Arial" charset="0"/>
-                        <a:ea typeface="Arial" charset="0"/>
-                        <a:cs typeface="Arial" charset="0"/>
-                      </a:endParaRPr>
-                    </a:p>
-                  </a:txBody>
-                  <a:tcPr marL="73152" marR="73152" marT="27432" marB="27432" anchor="ctr">
-                    <a:lnL w="9525" cap="flat" cmpd="sng" algn="ctr">
-                      <a:solidFill>
-                        <a:srgbClr val="E4DDCB"/>
-                      </a:solidFill>
-                      <a:prstDash val="solid"/>
-                      <a:round/>
-                      <a:headEnd type="none" w="med" len="med"/>
-                      <a:tailEnd type="none" w="med" len="med"/>
-                    </a:lnL>
-                    <a:lnR w="9525" cap="flat" cmpd="sng" algn="ctr">
-                      <a:solidFill>
-                        <a:srgbClr val="E4DDCB"/>
-                      </a:solidFill>
-                      <a:prstDash val="solid"/>
-                      <a:round/>
-                      <a:headEnd type="none" w="med" len="med"/>
-                      <a:tailEnd type="none" w="med" len="med"/>
-                    </a:lnR>
-                    <a:lnT w="9525" cap="flat" cmpd="sng" algn="ctr">
-                      <a:solidFill>
-                        <a:srgbClr val="E4DDCB"/>
-                      </a:solidFill>
-                      <a:prstDash val="solid"/>
-                      <a:round/>
-                      <a:headEnd type="none" w="med" len="med"/>
-                      <a:tailEnd type="none" w="med" len="med"/>
-                    </a:lnT>
-                    <a:lnB w="9525" cap="flat" cmpd="sng" algn="ctr">
-                      <a:solidFill>
-                        <a:srgbClr val="E4DDCB"/>
-                      </a:solidFill>
-                      <a:prstDash val="solid"/>
-                      <a:round/>
-                      <a:headEnd type="none" w="med" len="med"/>
-                      <a:tailEnd type="none" w="med" len="med"/>
-                    </a:lnB>
-                  </a:tcPr>
-                </a:tc>
-                <a:tc>
-                  <a:txBody>
-                    <a:bodyPr/>
-                    <a:lstStyle/>
-                    <a:p>
-                      <a:pPr algn="r" indent="0" marL="0">
-                        <a:buNone/>
-                      </a:pPr>
-                      <a:r>
-                        <a:rPr lang="en-US" sz="1150" dirty="0">
-                          <a:solidFill>
-                            <a:srgbClr val="3E3426"/>
-                          </a:solidFill>
-                          <a:latin typeface="Arial" pitchFamily="34" charset="0"/>
-                          <a:ea typeface="Arial" pitchFamily="34" charset="-122"/>
-                          <a:cs typeface="Arial" pitchFamily="34" charset="-120"/>
-                        </a:rPr>
-                        <a:t>חניך 8 + חניך 9</a:t>
+                        <a:t>חניך 8 + חניך 4</a:t>
                       </a:r>
                       <a:endParaRPr lang="en-US" sz="1150" dirty="0">
                         <a:latin typeface="Arial" charset="0"/>
@@ -16220,7 +17537,7 @@
                           <a:ea typeface="Arial" pitchFamily="34" charset="-122"/>
                           <a:cs typeface="Arial" pitchFamily="34" charset="-120"/>
                         </a:rPr>
-                        <a:t>חניך 4 + חניך 2</a:t>
+                        <a:t>חניך 1 + חניך 6</a:t>
                       </a:r>
                       <a:endParaRPr lang="en-US" sz="1150" dirty="0">
                         <a:latin typeface="Arial" charset="0"/>
@@ -17244,7 +18561,7 @@
                           <a:ea typeface="Arial" pitchFamily="34" charset="-122"/>
                           <a:cs typeface="Arial" pitchFamily="34" charset="-120"/>
                         </a:rPr>
-                        <a:t>חניך 5 + חניך 10</a:t>
+                        <a:t>חניך 7 + חניך 5</a:t>
                       </a:r>
                       <a:endParaRPr lang="en-US" sz="1150" dirty="0">
                         <a:latin typeface="Arial" charset="0"/>
@@ -17636,7 +18953,7 @@
                           <a:ea typeface="Arial" pitchFamily="34" charset="-122"/>
                           <a:cs typeface="Arial" pitchFamily="34" charset="-120"/>
                         </a:rPr>
-                        <a:t>חניך 1 + חניך 3</a:t>
+                        <a:t>חניך 8 + חניך 2</a:t>
                       </a:r>
                       <a:endParaRPr lang="en-US" sz="1150" dirty="0">
                         <a:latin typeface="Arial" charset="0"/>
@@ -18028,7 +19345,7 @@
                           <a:ea typeface="Arial" pitchFamily="34" charset="-122"/>
                           <a:cs typeface="Arial" pitchFamily="34" charset="-120"/>
                         </a:rPr>
-                        <a:t>חניך 6 + חניך 9</a:t>
+                        <a:t>חניך 9 + חניך 10</a:t>
                       </a:r>
                       <a:endParaRPr lang="en-US" sz="1150" dirty="0">
                         <a:latin typeface="Arial" charset="0"/>
@@ -18420,7 +19737,7 @@
                           <a:ea typeface="Arial" pitchFamily="34" charset="-122"/>
                           <a:cs typeface="Arial" pitchFamily="34" charset="-120"/>
                         </a:rPr>
-                        <a:t>חניך 7 + חניך 8</a:t>
+                        <a:t>חניך 1 + חניך 5</a:t>
                       </a:r>
                       <a:endParaRPr lang="en-US" sz="1150" dirty="0">
                         <a:latin typeface="Arial" charset="0"/>
@@ -18812,7 +20129,7 @@
                           <a:ea typeface="Arial" pitchFamily="34" charset="-122"/>
                           <a:cs typeface="Arial" pitchFamily="34" charset="-120"/>
                         </a:rPr>
-                        <a:t>חניך 4 + חניך 5</a:t>
+                        <a:t>חניך 6 + חניך 4</a:t>
                       </a:r>
                       <a:endParaRPr lang="en-US" sz="1150" dirty="0">
                         <a:latin typeface="Arial" charset="0"/>
@@ -19204,7 +20521,7 @@
                           <a:ea typeface="Arial" pitchFamily="34" charset="-122"/>
                           <a:cs typeface="Arial" pitchFamily="34" charset="-120"/>
                         </a:rPr>
-                        <a:t>חניך 3 + חניך 6</a:t>
+                        <a:t>חניך 7 + חניך 3</a:t>
                       </a:r>
                       <a:endParaRPr lang="en-US" sz="1150" dirty="0">
                         <a:latin typeface="Arial" charset="0"/>
@@ -19596,7 +20913,7 @@
                           <a:ea typeface="Arial" pitchFamily="34" charset="-122"/>
                           <a:cs typeface="Arial" pitchFamily="34" charset="-120"/>
                         </a:rPr>
-                        <a:t>חניך 10 + חניך 8</a:t>
+                        <a:t>חניך 2 + חניך 9</a:t>
                       </a:r>
                       <a:endParaRPr lang="en-US" sz="1150" dirty="0">
                         <a:latin typeface="Arial" charset="0"/>
@@ -19988,7 +21305,7 @@
                           <a:ea typeface="Arial" pitchFamily="34" charset="-122"/>
                           <a:cs typeface="Arial" pitchFamily="34" charset="-120"/>
                         </a:rPr>
-                        <a:t>חניך 1 + חניך 9</a:t>
+                        <a:t>חניך 1 + חניך 10</a:t>
                       </a:r>
                       <a:endParaRPr lang="en-US" sz="1150" dirty="0">
                         <a:latin typeface="Arial" charset="0"/>
@@ -20380,7 +21697,7 @@
                           <a:ea typeface="Arial" pitchFamily="34" charset="-122"/>
                           <a:cs typeface="Arial" pitchFamily="34" charset="-120"/>
                         </a:rPr>
-                        <a:t>חניך 2 + חניך 7</a:t>
+                        <a:t>חניך 3 + חניך 8</a:t>
                       </a:r>
                       <a:endParaRPr lang="en-US" sz="1150" dirty="0">
                         <a:latin typeface="Arial" charset="0"/>
@@ -20772,7 +22089,7 @@
                           <a:ea typeface="Arial" pitchFamily="34" charset="-122"/>
                           <a:cs typeface="Arial" pitchFamily="34" charset="-120"/>
                         </a:rPr>
-                        <a:t>חניך 8 + חניך 6</a:t>
+                        <a:t>חניך 5 + חניך 6</a:t>
                       </a:r>
                       <a:endParaRPr lang="en-US" sz="1150" dirty="0">
                         <a:latin typeface="Arial" charset="0"/>
